--- a/Foundation_F1/F1-L05_One_Letter_Four_Positions.pptx
+++ b/Foundation_F1/F1-L05_One_Letter_Four_Positions.pptx
@@ -527,7 +527,11 @@
           <a:lstStyle/>
           <a:p>
             <a:r>
-              <a:rPr lang="en-US" dirty="0"/>
+              <a:rPr lang="ar-SA" dirty="0">
+                <a:latin typeface="Amiri" pitchFamily="2" charset="-78"/>
+                <a:ea typeface="Amiri" pitchFamily="2" charset="-78"/>
+                <a:cs typeface="Amiri" pitchFamily="2" charset="-78"/>
+              </a:rPr>
               <a:t>LESSON AT A GLANCE — planned for 56 minutes, leaving about 4 minutes for Teams delays.
 0–1 Welcome · 1–2 Lesson map · 2–9 Do Now + answers · 9–10 Objectives · 10–20 New letters and sounds · 20–23 Quick check · 23–27 I Do (formation) · 27–38 We Do (listen, sort, detect) · 38–49 You Do (write, then show-and-say) · 49–54 Feedback · 54–56 Preparation.
 FLEX slides are optional. Use them if the class is moving quickly; otherwise the same activities are on the website for homework.
@@ -626,7 +630,11 @@
           <a:lstStyle/>
           <a:p>
             <a:r>
-              <a:rPr lang="en-US" dirty="0"/>
+              <a:rPr lang="ar-SA" dirty="0">
+                <a:latin typeface="Amiri" pitchFamily="2" charset="-78"/>
+                <a:ea typeface="Amiri" pitchFamily="2" charset="-78"/>
+                <a:cs typeface="Amiri" pitchFamily="2" charset="-78"/>
+              </a:rPr>
               <a:t>FAMILY TRANSFER (website Part 2): the body transformation transfers across related letters; dots remain the identity check.
 Website routes: Core — trace one body family in four columns; add dots only after the body is correct. Develop — cover one column and rebuild it from the connection rule. Stretch — explain which details are identity clues and which are joining strokes.
 Note: in the initial and medial forms ب ت ث lose their “bowl” and become a small “tooth” — the dots are the only clue left.</a:t>
@@ -716,7 +724,11 @@
           <a:lstStyle/>
           <a:p>
             <a:r>
-              <a:rPr lang="en-US" dirty="0"/>
+              <a:rPr lang="ar-SA" dirty="0">
+                <a:latin typeface="Amiri" pitchFamily="2" charset="-78"/>
+                <a:ea typeface="Amiri" pitchFamily="2" charset="-78"/>
+                <a:cs typeface="Amiri" pitchFamily="2" charset="-78"/>
+              </a:rPr>
               <a:t>NON-CONNECTORS (website Part 3): the labels still describe context, but each breaker has only two visibly different patterns: isolated and initial share the unjoined form; medial and final share the form joined from the right.
 The break is after the letter: alif may receive a join from its right, but the following bāʾ on its left cannot join back to it.
 Shape label vs word position (website): in كِتَاب the final bāʾ is at the end of the word but looks ISOLATED because alif breaks the connection before it — it is not an initial form.</a:t>
@@ -985,7 +997,11 @@
           <a:lstStyle/>
           <a:p>
             <a:r>
-              <a:rPr lang="en-US" dirty="0"/>
+              <a:rPr lang="ar-SA" dirty="0">
+                <a:latin typeface="Amiri" pitchFamily="2" charset="-78"/>
+                <a:ea typeface="Amiri" pitchFamily="2" charset="-78"/>
+                <a:cs typeface="Amiri" pitchFamily="2" charset="-78"/>
+              </a:rPr>
               <a:t>I DO — WORD X-RAY (4 min), website Part 4. Think aloud for each word, right to left:
 “كَتَبَ: kāf has no neighbour on its right → initial. tāʾ has kāf on its right (a connector) and bāʾ on its left → medial. bāʾ has tāʾ on its right, nothing on its left → final.”
 “بَابٌ: bāʾ initial; alif receives the join but cannot pass it on; so the last bāʾ is at the END of the word but looks ISOLATED.”
@@ -1077,7 +1093,11 @@
           <a:lstStyle/>
           <a:p>
             <a:r>
-              <a:rPr lang="en-US" dirty="0"/>
+              <a:rPr lang="ar-SA" dirty="0">
+                <a:latin typeface="Amiri" pitchFamily="2" charset="-78"/>
+                <a:ea typeface="Amiri" pitchFamily="2" charset="-78"/>
+                <a:cs typeface="Amiri" pitchFamily="2" charset="-78"/>
+              </a:rPr>
               <a:t>FORMATION PRACTICE (website): select connector letters and copy each row across four labelled columns using a verified model. Model each row on the pen tablet, saying “start · middle · end”, then students copy into four labelled columns. ʿayn and hāʾ change the most — point out the medial ـعـ and ـهـ shapes.</a:t>
             </a:r>
             <a:endParaRPr lang="en-US" dirty="0"/>
@@ -1517,7 +1537,11 @@
           <a:lstStyle/>
           <a:p>
             <a:r>
-              <a:rPr lang="en-US" dirty="0"/>
+              <a:rPr lang="ar-SA" dirty="0">
+                <a:latin typeface="Amiri" pitchFamily="2" charset="-78"/>
+                <a:ea typeface="Amiri" pitchFamily="2" charset="-78"/>
+                <a:cs typeface="Amiri" pitchFamily="2" charset="-78"/>
+              </a:rPr>
               <a:t>WELCOME (1 min) — while students join.
 • Greet each student by name as they arrive: السَّلَامُ عَلَيْكُمْ. Take the register (Pastoral Tracker: attendance 0/1).
 • 2-MINUTE CHECK-IN (SEND training): a private chat to any student who seemed unsettled last lesson — “Are you okay today? 👍 / 👎”.
@@ -1786,7 +1810,11 @@
           <a:lstStyle/>
           <a:p>
             <a:r>
-              <a:rPr lang="en-US" dirty="0"/>
+              <a:rPr lang="ar-SA" dirty="0">
+                <a:latin typeface="Amiri" pitchFamily="2" charset="-78"/>
+                <a:ea typeface="Amiri" pitchFamily="2" charset="-78"/>
+                <a:cs typeface="Amiri" pitchFamily="2" charset="-78"/>
+              </a:rPr>
               <a:t>YOU DO — WRITING (7 min) = the website formation practice, homework and Heritage extension, split by route. LIVE FEEDBACK after 3 minutes: check the teeth of ب ت ث in initial/medial forms and dot positions.</a:t>
             </a:r>
             <a:endParaRPr lang="en-US" dirty="0"/>
@@ -1874,7 +1902,11 @@
           <a:lstStyle/>
           <a:p>
             <a:r>
-              <a:rPr lang="en-US" dirty="0"/>
+              <a:rPr lang="ar-SA" dirty="0">
+                <a:latin typeface="Amiri" pitchFamily="2" charset="-78"/>
+                <a:ea typeface="Amiri" pitchFamily="2" charset="-78"/>
+                <a:cs typeface="Amiri" pitchFamily="2" charset="-78"/>
+              </a:rPr>
               <a:t>SPEAKING REHEARSAL (3 min) — website speaking prompts (the Core prompt is teacher-made). No breakout rooms (saves setup time).
 Sequence: ● 10s think → ↔ 45s everyone rehearses their answer aloud with mic muted → ◎ pairs on open mic: name two students (warned in advance); A asks, B answers; the rest of the class types one follow-up question in chat (+ / ?) → ↺ one student summarises the answer they heard.
 Routes: Core uses the Core prompt and stem; Develop the Develop prompts; Stretch the last prompt.
@@ -2863,7 +2895,11 @@
           <a:lstStyle/>
           <a:p>
             <a:r>
-              <a:rPr lang="en-US" dirty="0"/>
+              <a:rPr lang="ar-SA" dirty="0">
+                <a:latin typeface="Amiri" pitchFamily="2" charset="-78"/>
+                <a:ea typeface="Amiri" pitchFamily="2" charset="-78"/>
+                <a:cs typeface="Amiri" pitchFamily="2" charset="-78"/>
+              </a:rPr>
               <a:t>KEY WORDS — HOW TO TEACH EACH GROUP (EAL pre-teaching routine, 7 min)
 1. HEAR IT: say the word twice, clearly, with a gesture where possible.
 2. SAY IT: choral repetition — “I say, you say” — then two volunteers.
@@ -3533,6 +3569,7 @@
                   <a:srgbClr val="D4AF37"/>
                 </a:solidFill>
                 <a:latin typeface="Amiri" pitchFamily="2" charset="-78"/>
+                <a:ea typeface="Amiri" pitchFamily="2" charset="-78"/>
                 <a:cs typeface="Amiri" pitchFamily="2" charset="-78"/>
               </a:rPr>
               <a:t>م</a:t>
@@ -3739,6 +3776,7 @@
                   <a:srgbClr val="D4AF37"/>
                 </a:solidFill>
                 <a:latin typeface="Amiri" pitchFamily="2" charset="-78"/>
+                <a:ea typeface="Amiri" pitchFamily="2" charset="-78"/>
                 <a:cs typeface="Amiri" pitchFamily="2" charset="-78"/>
               </a:rPr>
               <a:t>أَشْكَالُ الحُرُوفِ فِي الكَلِمَةِ</a:t>
@@ -4196,6 +4234,7 @@
                   <a:srgbClr val="D4AF37"/>
                 </a:solidFill>
                 <a:latin typeface="Amiri" pitchFamily="2" charset="-78"/>
+                <a:ea typeface="Amiri" pitchFamily="2" charset="-78"/>
                 <a:cs typeface="Amiri" pitchFamily="2" charset="-78"/>
               </a:rPr>
               <a:t>م</a:t>
@@ -4516,6 +4555,7 @@
                   <a:srgbClr val="8A6D1E"/>
                 </a:solidFill>
                 <a:latin typeface="Amiri" pitchFamily="2" charset="-78"/>
+                <a:ea typeface="Amiri" pitchFamily="2" charset="-78"/>
                 <a:cs typeface="Amiri" pitchFamily="2" charset="-78"/>
               </a:rPr>
               <a:t>العَائِلَاتُ</a:t>
@@ -4872,6 +4912,7 @@
                   <a:srgbClr val="1B3B6F"/>
                 </a:solidFill>
                 <a:latin typeface="Amiri" pitchFamily="2" charset="-78"/>
+                <a:ea typeface="Amiri" pitchFamily="2" charset="-78"/>
                 <a:cs typeface="Amiri" pitchFamily="2" charset="-78"/>
               </a:rPr>
               <a:t>ب</a:t>
@@ -4910,6 +4951,7 @@
                   <a:srgbClr val="1B3B6F"/>
                 </a:solidFill>
                 <a:latin typeface="Amiri" pitchFamily="2" charset="-78"/>
+                <a:ea typeface="Amiri" pitchFamily="2" charset="-78"/>
                 <a:cs typeface="Amiri" pitchFamily="2" charset="-78"/>
               </a:rPr>
               <a:t>بـ</a:t>
@@ -4948,6 +4990,7 @@
                   <a:srgbClr val="1B3B6F"/>
                 </a:solidFill>
                 <a:latin typeface="Amiri" pitchFamily="2" charset="-78"/>
+                <a:ea typeface="Amiri" pitchFamily="2" charset="-78"/>
                 <a:cs typeface="Amiri" pitchFamily="2" charset="-78"/>
               </a:rPr>
               <a:t>ـبـ</a:t>
@@ -4986,6 +5029,7 @@
                   <a:srgbClr val="1B3B6F"/>
                 </a:solidFill>
                 <a:latin typeface="Amiri" pitchFamily="2" charset="-78"/>
+                <a:ea typeface="Amiri" pitchFamily="2" charset="-78"/>
                 <a:cs typeface="Amiri" pitchFamily="2" charset="-78"/>
               </a:rPr>
               <a:t>ـب</a:t>
@@ -5154,6 +5198,7 @@
                   <a:srgbClr val="1B3B6F"/>
                 </a:solidFill>
                 <a:latin typeface="Amiri" pitchFamily="2" charset="-78"/>
+                <a:ea typeface="Amiri" pitchFamily="2" charset="-78"/>
                 <a:cs typeface="Amiri" pitchFamily="2" charset="-78"/>
               </a:rPr>
               <a:t>ت</a:t>
@@ -5192,6 +5237,7 @@
                   <a:srgbClr val="1B3B6F"/>
                 </a:solidFill>
                 <a:latin typeface="Amiri" pitchFamily="2" charset="-78"/>
+                <a:ea typeface="Amiri" pitchFamily="2" charset="-78"/>
                 <a:cs typeface="Amiri" pitchFamily="2" charset="-78"/>
               </a:rPr>
               <a:t>تـ</a:t>
@@ -5230,6 +5276,7 @@
                   <a:srgbClr val="1B3B6F"/>
                 </a:solidFill>
                 <a:latin typeface="Amiri" pitchFamily="2" charset="-78"/>
+                <a:ea typeface="Amiri" pitchFamily="2" charset="-78"/>
                 <a:cs typeface="Amiri" pitchFamily="2" charset="-78"/>
               </a:rPr>
               <a:t>ـتـ</a:t>
@@ -5268,6 +5315,7 @@
                   <a:srgbClr val="1B3B6F"/>
                 </a:solidFill>
                 <a:latin typeface="Amiri" pitchFamily="2" charset="-78"/>
+                <a:ea typeface="Amiri" pitchFamily="2" charset="-78"/>
                 <a:cs typeface="Amiri" pitchFamily="2" charset="-78"/>
               </a:rPr>
               <a:t>ـت</a:t>
@@ -5436,6 +5484,7 @@
                   <a:srgbClr val="1B3B6F"/>
                 </a:solidFill>
                 <a:latin typeface="Amiri" pitchFamily="2" charset="-78"/>
+                <a:ea typeface="Amiri" pitchFamily="2" charset="-78"/>
                 <a:cs typeface="Amiri" pitchFamily="2" charset="-78"/>
               </a:rPr>
               <a:t>ث</a:t>
@@ -5474,6 +5523,7 @@
                   <a:srgbClr val="1B3B6F"/>
                 </a:solidFill>
                 <a:latin typeface="Amiri" pitchFamily="2" charset="-78"/>
+                <a:ea typeface="Amiri" pitchFamily="2" charset="-78"/>
                 <a:cs typeface="Amiri" pitchFamily="2" charset="-78"/>
               </a:rPr>
               <a:t>ثـ</a:t>
@@ -5512,6 +5562,7 @@
                   <a:srgbClr val="1B3B6F"/>
                 </a:solidFill>
                 <a:latin typeface="Amiri" pitchFamily="2" charset="-78"/>
+                <a:ea typeface="Amiri" pitchFamily="2" charset="-78"/>
                 <a:cs typeface="Amiri" pitchFamily="2" charset="-78"/>
               </a:rPr>
               <a:t>ـثـ</a:t>
@@ -5550,6 +5601,7 @@
                   <a:srgbClr val="1B3B6F"/>
                 </a:solidFill>
                 <a:latin typeface="Amiri" pitchFamily="2" charset="-78"/>
+                <a:ea typeface="Amiri" pitchFamily="2" charset="-78"/>
                 <a:cs typeface="Amiri" pitchFamily="2" charset="-78"/>
               </a:rPr>
               <a:t>ـث</a:t>
@@ -5718,6 +5770,7 @@
                   <a:srgbClr val="1B3B6F"/>
                 </a:solidFill>
                 <a:latin typeface="Amiri" pitchFamily="2" charset="-78"/>
+                <a:ea typeface="Amiri" pitchFamily="2" charset="-78"/>
                 <a:cs typeface="Amiri" pitchFamily="2" charset="-78"/>
               </a:rPr>
               <a:t>ج</a:t>
@@ -5756,6 +5809,7 @@
                   <a:srgbClr val="1B3B6F"/>
                 </a:solidFill>
                 <a:latin typeface="Amiri" pitchFamily="2" charset="-78"/>
+                <a:ea typeface="Amiri" pitchFamily="2" charset="-78"/>
                 <a:cs typeface="Amiri" pitchFamily="2" charset="-78"/>
               </a:rPr>
               <a:t>جـ</a:t>
@@ -5794,6 +5848,7 @@
                   <a:srgbClr val="1B3B6F"/>
                 </a:solidFill>
                 <a:latin typeface="Amiri" pitchFamily="2" charset="-78"/>
+                <a:ea typeface="Amiri" pitchFamily="2" charset="-78"/>
                 <a:cs typeface="Amiri" pitchFamily="2" charset="-78"/>
               </a:rPr>
               <a:t>ـجـ</a:t>
@@ -5832,6 +5887,7 @@
                   <a:srgbClr val="1B3B6F"/>
                 </a:solidFill>
                 <a:latin typeface="Amiri" pitchFamily="2" charset="-78"/>
+                <a:ea typeface="Amiri" pitchFamily="2" charset="-78"/>
                 <a:cs typeface="Amiri" pitchFamily="2" charset="-78"/>
               </a:rPr>
               <a:t>ـج</a:t>
@@ -5935,6 +5991,7 @@
                   <a:srgbClr val="1B3B6F"/>
                 </a:solidFill>
                 <a:latin typeface="Amiri" pitchFamily="2" charset="-78"/>
+                <a:ea typeface="Amiri" pitchFamily="2" charset="-78"/>
                 <a:cs typeface="Amiri" pitchFamily="2" charset="-78"/>
               </a:rPr>
               <a:t>ح</a:t>
@@ -5973,6 +6030,7 @@
                   <a:srgbClr val="1B3B6F"/>
                 </a:solidFill>
                 <a:latin typeface="Amiri" pitchFamily="2" charset="-78"/>
+                <a:ea typeface="Amiri" pitchFamily="2" charset="-78"/>
                 <a:cs typeface="Amiri" pitchFamily="2" charset="-78"/>
               </a:rPr>
               <a:t>حـ</a:t>
@@ -6011,6 +6069,7 @@
                   <a:srgbClr val="1B3B6F"/>
                 </a:solidFill>
                 <a:latin typeface="Amiri" pitchFamily="2" charset="-78"/>
+                <a:ea typeface="Amiri" pitchFamily="2" charset="-78"/>
                 <a:cs typeface="Amiri" pitchFamily="2" charset="-78"/>
               </a:rPr>
               <a:t>ـحـ</a:t>
@@ -6049,6 +6108,7 @@
                   <a:srgbClr val="1B3B6F"/>
                 </a:solidFill>
                 <a:latin typeface="Amiri" pitchFamily="2" charset="-78"/>
+                <a:ea typeface="Amiri" pitchFamily="2" charset="-78"/>
                 <a:cs typeface="Amiri" pitchFamily="2" charset="-78"/>
               </a:rPr>
               <a:t>ـح</a:t>
@@ -6152,6 +6212,7 @@
                   <a:srgbClr val="1B3B6F"/>
                 </a:solidFill>
                 <a:latin typeface="Amiri" pitchFamily="2" charset="-78"/>
+                <a:ea typeface="Amiri" pitchFamily="2" charset="-78"/>
                 <a:cs typeface="Amiri" pitchFamily="2" charset="-78"/>
               </a:rPr>
               <a:t>خ</a:t>
@@ -6190,6 +6251,7 @@
                   <a:srgbClr val="1B3B6F"/>
                 </a:solidFill>
                 <a:latin typeface="Amiri" pitchFamily="2" charset="-78"/>
+                <a:ea typeface="Amiri" pitchFamily="2" charset="-78"/>
                 <a:cs typeface="Amiri" pitchFamily="2" charset="-78"/>
               </a:rPr>
               <a:t>خـ</a:t>
@@ -6228,6 +6290,7 @@
                   <a:srgbClr val="1B3B6F"/>
                 </a:solidFill>
                 <a:latin typeface="Amiri" pitchFamily="2" charset="-78"/>
+                <a:ea typeface="Amiri" pitchFamily="2" charset="-78"/>
                 <a:cs typeface="Amiri" pitchFamily="2" charset="-78"/>
               </a:rPr>
               <a:t>ـخـ</a:t>
@@ -6266,6 +6329,7 @@
                   <a:srgbClr val="1B3B6F"/>
                 </a:solidFill>
                 <a:latin typeface="Amiri" pitchFamily="2" charset="-78"/>
+                <a:ea typeface="Amiri" pitchFamily="2" charset="-78"/>
                 <a:cs typeface="Amiri" pitchFamily="2" charset="-78"/>
               </a:rPr>
               <a:t>ـخ</a:t>
@@ -6399,6 +6463,7 @@
                   <a:srgbClr val="D4AF37"/>
                 </a:solidFill>
                 <a:latin typeface="Amiri" pitchFamily="2" charset="-78"/>
+                <a:ea typeface="Amiri" pitchFamily="2" charset="-78"/>
                 <a:cs typeface="Amiri" pitchFamily="2" charset="-78"/>
               </a:rPr>
               <a:t>م</a:t>
@@ -6719,6 +6784,7 @@
                   <a:srgbClr val="8A6D1E"/>
                 </a:solidFill>
                 <a:latin typeface="Amiri" pitchFamily="2" charset="-78"/>
+                <a:ea typeface="Amiri" pitchFamily="2" charset="-78"/>
                 <a:cs typeface="Amiri" pitchFamily="2" charset="-78"/>
               </a:rPr>
               <a:t>الحُرُوفُ الَّتِي لَا تَتَّصِلُ</a:t>
@@ -7075,6 +7141,7 @@
                   <a:srgbClr val="1B3B6F"/>
                 </a:solidFill>
                 <a:latin typeface="Amiri" pitchFamily="2" charset="-78"/>
+                <a:ea typeface="Amiri" pitchFamily="2" charset="-78"/>
                 <a:cs typeface="Amiri" pitchFamily="2" charset="-78"/>
               </a:rPr>
               <a:t>ا</a:t>
@@ -7113,6 +7180,7 @@
                   <a:srgbClr val="1B3B6F"/>
                 </a:solidFill>
                 <a:latin typeface="Amiri" pitchFamily="2" charset="-78"/>
+                <a:ea typeface="Amiri" pitchFamily="2" charset="-78"/>
                 <a:cs typeface="Amiri" pitchFamily="2" charset="-78"/>
               </a:rPr>
               <a:t>ا</a:t>
@@ -7151,6 +7219,7 @@
                   <a:srgbClr val="1B3B6F"/>
                 </a:solidFill>
                 <a:latin typeface="Amiri" pitchFamily="2" charset="-78"/>
+                <a:ea typeface="Amiri" pitchFamily="2" charset="-78"/>
                 <a:cs typeface="Amiri" pitchFamily="2" charset="-78"/>
               </a:rPr>
               <a:t>ـا</a:t>
@@ -7189,6 +7258,7 @@
                   <a:srgbClr val="1B3B6F"/>
                 </a:solidFill>
                 <a:latin typeface="Amiri" pitchFamily="2" charset="-78"/>
+                <a:ea typeface="Amiri" pitchFamily="2" charset="-78"/>
                 <a:cs typeface="Amiri" pitchFamily="2" charset="-78"/>
               </a:rPr>
               <a:t>ـا</a:t>
@@ -7357,6 +7427,7 @@
                   <a:srgbClr val="1B3B6F"/>
                 </a:solidFill>
                 <a:latin typeface="Amiri" pitchFamily="2" charset="-78"/>
+                <a:ea typeface="Amiri" pitchFamily="2" charset="-78"/>
                 <a:cs typeface="Amiri" pitchFamily="2" charset="-78"/>
               </a:rPr>
               <a:t>د</a:t>
@@ -7395,6 +7466,7 @@
                   <a:srgbClr val="1B3B6F"/>
                 </a:solidFill>
                 <a:latin typeface="Amiri" pitchFamily="2" charset="-78"/>
+                <a:ea typeface="Amiri" pitchFamily="2" charset="-78"/>
                 <a:cs typeface="Amiri" pitchFamily="2" charset="-78"/>
               </a:rPr>
               <a:t>د</a:t>
@@ -7433,6 +7505,7 @@
                   <a:srgbClr val="1B3B6F"/>
                 </a:solidFill>
                 <a:latin typeface="Amiri" pitchFamily="2" charset="-78"/>
+                <a:ea typeface="Amiri" pitchFamily="2" charset="-78"/>
                 <a:cs typeface="Amiri" pitchFamily="2" charset="-78"/>
               </a:rPr>
               <a:t>ـد</a:t>
@@ -7471,6 +7544,7 @@
                   <a:srgbClr val="1B3B6F"/>
                 </a:solidFill>
                 <a:latin typeface="Amiri" pitchFamily="2" charset="-78"/>
+                <a:ea typeface="Amiri" pitchFamily="2" charset="-78"/>
                 <a:cs typeface="Amiri" pitchFamily="2" charset="-78"/>
               </a:rPr>
               <a:t>ـد</a:t>
@@ -7639,6 +7713,7 @@
                   <a:srgbClr val="1B3B6F"/>
                 </a:solidFill>
                 <a:latin typeface="Amiri" pitchFamily="2" charset="-78"/>
+                <a:ea typeface="Amiri" pitchFamily="2" charset="-78"/>
                 <a:cs typeface="Amiri" pitchFamily="2" charset="-78"/>
               </a:rPr>
               <a:t>ر</a:t>
@@ -7677,6 +7752,7 @@
                   <a:srgbClr val="1B3B6F"/>
                 </a:solidFill>
                 <a:latin typeface="Amiri" pitchFamily="2" charset="-78"/>
+                <a:ea typeface="Amiri" pitchFamily="2" charset="-78"/>
                 <a:cs typeface="Amiri" pitchFamily="2" charset="-78"/>
               </a:rPr>
               <a:t>ر</a:t>
@@ -7715,6 +7791,7 @@
                   <a:srgbClr val="1B3B6F"/>
                 </a:solidFill>
                 <a:latin typeface="Amiri" pitchFamily="2" charset="-78"/>
+                <a:ea typeface="Amiri" pitchFamily="2" charset="-78"/>
                 <a:cs typeface="Amiri" pitchFamily="2" charset="-78"/>
               </a:rPr>
               <a:t>ـر</a:t>
@@ -7753,6 +7830,7 @@
                   <a:srgbClr val="1B3B6F"/>
                 </a:solidFill>
                 <a:latin typeface="Amiri" pitchFamily="2" charset="-78"/>
+                <a:ea typeface="Amiri" pitchFamily="2" charset="-78"/>
                 <a:cs typeface="Amiri" pitchFamily="2" charset="-78"/>
               </a:rPr>
               <a:t>ـر</a:t>
@@ -7921,6 +7999,7 @@
                   <a:srgbClr val="1B3B6F"/>
                 </a:solidFill>
                 <a:latin typeface="Amiri" pitchFamily="2" charset="-78"/>
+                <a:ea typeface="Amiri" pitchFamily="2" charset="-78"/>
                 <a:cs typeface="Amiri" pitchFamily="2" charset="-78"/>
               </a:rPr>
               <a:t>و</a:t>
@@ -7959,6 +8038,7 @@
                   <a:srgbClr val="1B3B6F"/>
                 </a:solidFill>
                 <a:latin typeface="Amiri" pitchFamily="2" charset="-78"/>
+                <a:ea typeface="Amiri" pitchFamily="2" charset="-78"/>
                 <a:cs typeface="Amiri" pitchFamily="2" charset="-78"/>
               </a:rPr>
               <a:t>و</a:t>
@@ -7997,6 +8077,7 @@
                   <a:srgbClr val="1B3B6F"/>
                 </a:solidFill>
                 <a:latin typeface="Amiri" pitchFamily="2" charset="-78"/>
+                <a:ea typeface="Amiri" pitchFamily="2" charset="-78"/>
                 <a:cs typeface="Amiri" pitchFamily="2" charset="-78"/>
               </a:rPr>
               <a:t>ـو</a:t>
@@ -8035,6 +8116,7 @@
                   <a:srgbClr val="1B3B6F"/>
                 </a:solidFill>
                 <a:latin typeface="Amiri" pitchFamily="2" charset="-78"/>
+                <a:ea typeface="Amiri" pitchFamily="2" charset="-78"/>
                 <a:cs typeface="Amiri" pitchFamily="2" charset="-78"/>
               </a:rPr>
               <a:t>ـو</a:t>
@@ -8203,6 +8285,7 @@
                   <a:srgbClr val="1B3B6F"/>
                 </a:solidFill>
                 <a:latin typeface="Amiri" pitchFamily="2" charset="-78"/>
+                <a:ea typeface="Amiri" pitchFamily="2" charset="-78"/>
                 <a:cs typeface="Amiri" pitchFamily="2" charset="-78"/>
               </a:rPr>
               <a:t>ذ  ز</a:t>
@@ -8241,6 +8324,7 @@
                   <a:srgbClr val="1B3B6F"/>
                 </a:solidFill>
                 <a:latin typeface="Amiri" pitchFamily="2" charset="-78"/>
+                <a:ea typeface="Amiri" pitchFamily="2" charset="-78"/>
                 <a:cs typeface="Amiri" pitchFamily="2" charset="-78"/>
               </a:rPr>
               <a:t>ذ  ز</a:t>
@@ -8279,6 +8363,7 @@
                   <a:srgbClr val="1B3B6F"/>
                 </a:solidFill>
                 <a:latin typeface="Amiri" pitchFamily="2" charset="-78"/>
+                <a:ea typeface="Amiri" pitchFamily="2" charset="-78"/>
                 <a:cs typeface="Amiri" pitchFamily="2" charset="-78"/>
               </a:rPr>
               <a:t>ـذ  ـز</a:t>
@@ -8317,6 +8402,7 @@
                   <a:srgbClr val="1B3B6F"/>
                 </a:solidFill>
                 <a:latin typeface="Amiri" pitchFamily="2" charset="-78"/>
+                <a:ea typeface="Amiri" pitchFamily="2" charset="-78"/>
                 <a:cs typeface="Amiri" pitchFamily="2" charset="-78"/>
               </a:rPr>
               <a:t>ـذ  ـز</a:t>
@@ -8488,6 +8574,7 @@
                   <a:srgbClr val="D4AF37"/>
                 </a:solidFill>
                 <a:latin typeface="Amiri" pitchFamily="2" charset="-78"/>
+                <a:ea typeface="Amiri" pitchFamily="2" charset="-78"/>
                 <a:cs typeface="Amiri" pitchFamily="2" charset="-78"/>
               </a:rPr>
               <a:t>م</a:t>
@@ -8808,6 +8895,7 @@
                   <a:srgbClr val="8A6D1E"/>
                 </a:solidFill>
                 <a:latin typeface="Amiri" pitchFamily="2" charset="-78"/>
+                <a:ea typeface="Amiri" pitchFamily="2" charset="-78"/>
                 <a:cs typeface="Amiri" pitchFamily="2" charset="-78"/>
               </a:rPr>
               <a:t>فَحْصٌ سَرِيعٌ</a:t>
@@ -8994,6 +9082,7 @@
                   <a:srgbClr val="1B3B6F"/>
                 </a:solidFill>
                 <a:latin typeface="Amiri" pitchFamily="2" charset="-78"/>
+                <a:ea typeface="Amiri" pitchFamily="2" charset="-78"/>
                 <a:cs typeface="Amiri" pitchFamily="2" charset="-78"/>
               </a:rPr>
               <a:t>بـ</a:t>
@@ -9445,6 +9534,7 @@
                   <a:srgbClr val="1B3B6F"/>
                 </a:solidFill>
                 <a:latin typeface="Amiri" pitchFamily="2" charset="-78"/>
+                <a:ea typeface="Amiri" pitchFamily="2" charset="-78"/>
                 <a:cs typeface="Amiri" pitchFamily="2" charset="-78"/>
               </a:rPr>
               <a:t>ـتـ</a:t>
@@ -9896,6 +9986,7 @@
                   <a:srgbClr val="1B3B6F"/>
                 </a:solidFill>
                 <a:latin typeface="Amiri" pitchFamily="2" charset="-78"/>
+                <a:ea typeface="Amiri" pitchFamily="2" charset="-78"/>
                 <a:cs typeface="Amiri" pitchFamily="2" charset="-78"/>
               </a:rPr>
               <a:t>ـج</a:t>
@@ -10669,6 +10760,7 @@
                   <a:srgbClr val="D4AF37"/>
                 </a:solidFill>
                 <a:latin typeface="Amiri" pitchFamily="2" charset="-78"/>
+                <a:ea typeface="Amiri" pitchFamily="2" charset="-78"/>
                 <a:cs typeface="Amiri" pitchFamily="2" charset="-78"/>
               </a:rPr>
               <a:t>م</a:t>
@@ -10989,6 +11081,7 @@
                   <a:srgbClr val="8A6D1E"/>
                 </a:solidFill>
                 <a:latin typeface="Amiri" pitchFamily="2" charset="-78"/>
+                <a:ea typeface="Amiri" pitchFamily="2" charset="-78"/>
                 <a:cs typeface="Amiri" pitchFamily="2" charset="-78"/>
               </a:rPr>
               <a:t>الإِجَابَاتُ وَالتَّعْلِيلُ</a:t>
@@ -11175,6 +11268,7 @@
                   <a:srgbClr val="1B3B6F"/>
                 </a:solidFill>
                 <a:latin typeface="Amiri" pitchFamily="2" charset="-78"/>
+                <a:ea typeface="Amiri" pitchFamily="2" charset="-78"/>
                 <a:cs typeface="Amiri" pitchFamily="2" charset="-78"/>
               </a:rPr>
               <a:t>بـ</a:t>
@@ -11691,6 +11785,7 @@
                   <a:srgbClr val="1B3B6F"/>
                 </a:solidFill>
                 <a:latin typeface="Amiri" pitchFamily="2" charset="-78"/>
+                <a:ea typeface="Amiri" pitchFamily="2" charset="-78"/>
                 <a:cs typeface="Amiri" pitchFamily="2" charset="-78"/>
               </a:rPr>
               <a:t>ـتـ</a:t>
@@ -12207,6 +12302,7 @@
                   <a:srgbClr val="1B3B6F"/>
                 </a:solidFill>
                 <a:latin typeface="Amiri" pitchFamily="2" charset="-78"/>
+                <a:ea typeface="Amiri" pitchFamily="2" charset="-78"/>
                 <a:cs typeface="Amiri" pitchFamily="2" charset="-78"/>
               </a:rPr>
               <a:t>ـج</a:t>
@@ -13110,6 +13206,7 @@
                   <a:srgbClr val="D4AF37"/>
                 </a:solidFill>
                 <a:latin typeface="Amiri" pitchFamily="2" charset="-78"/>
+                <a:ea typeface="Amiri" pitchFamily="2" charset="-78"/>
                 <a:cs typeface="Amiri" pitchFamily="2" charset="-78"/>
               </a:rPr>
               <a:t>م</a:t>
@@ -13430,6 +13527,7 @@
                   <a:srgbClr val="8A6D1E"/>
                 </a:solidFill>
                 <a:latin typeface="Amiri" pitchFamily="2" charset="-78"/>
+                <a:ea typeface="Amiri" pitchFamily="2" charset="-78"/>
                 <a:cs typeface="Amiri" pitchFamily="2" charset="-78"/>
               </a:rPr>
               <a:t>بِنَاءُ الكَلِمَاتِ وَتَحْلِيلُهَا</a:t>
@@ -13748,6 +13846,7 @@
                   <a:srgbClr val="1B3B6F"/>
                 </a:solidFill>
                 <a:latin typeface="Amiri" pitchFamily="2" charset="-78"/>
+                <a:ea typeface="Amiri" pitchFamily="2" charset="-78"/>
                 <a:cs typeface="Amiri" pitchFamily="2" charset="-78"/>
               </a:rPr>
               <a:t>كَتَبَ</a:t>
@@ -13824,6 +13923,7 @@
                   <a:srgbClr val="1B3B6F"/>
                 </a:solidFill>
                 <a:latin typeface="Amiri" pitchFamily="2" charset="-78"/>
+                <a:ea typeface="Amiri" pitchFamily="2" charset="-78"/>
                 <a:cs typeface="Amiri" pitchFamily="2" charset="-78"/>
               </a:rPr>
               <a:t>كـ</a:t>
@@ -13900,6 +14000,7 @@
                   <a:srgbClr val="1B3B6F"/>
                 </a:solidFill>
                 <a:latin typeface="Amiri" pitchFamily="2" charset="-78"/>
+                <a:ea typeface="Amiri" pitchFamily="2" charset="-78"/>
                 <a:cs typeface="Amiri" pitchFamily="2" charset="-78"/>
               </a:rPr>
               <a:t>ـتـ</a:t>
@@ -13976,6 +14077,7 @@
                   <a:srgbClr val="1B3B6F"/>
                 </a:solidFill>
                 <a:latin typeface="Amiri" pitchFamily="2" charset="-78"/>
+                <a:ea typeface="Amiri" pitchFamily="2" charset="-78"/>
                 <a:cs typeface="Amiri" pitchFamily="2" charset="-78"/>
               </a:rPr>
               <a:t>ـب</a:t>
@@ -14182,6 +14284,7 @@
                   <a:srgbClr val="1B3B6F"/>
                 </a:solidFill>
                 <a:latin typeface="Amiri" pitchFamily="2" charset="-78"/>
+                <a:ea typeface="Amiri" pitchFamily="2" charset="-78"/>
                 <a:cs typeface="Amiri" pitchFamily="2" charset="-78"/>
               </a:rPr>
               <a:t>بَابٌ</a:t>
@@ -14258,6 +14361,7 @@
                   <a:srgbClr val="1B3B6F"/>
                 </a:solidFill>
                 <a:latin typeface="Amiri" pitchFamily="2" charset="-78"/>
+                <a:ea typeface="Amiri" pitchFamily="2" charset="-78"/>
                 <a:cs typeface="Amiri" pitchFamily="2" charset="-78"/>
               </a:rPr>
               <a:t>بـ</a:t>
@@ -14334,6 +14438,7 @@
                   <a:srgbClr val="1B3B6F"/>
                 </a:solidFill>
                 <a:latin typeface="Amiri" pitchFamily="2" charset="-78"/>
+                <a:ea typeface="Amiri" pitchFamily="2" charset="-78"/>
                 <a:cs typeface="Amiri" pitchFamily="2" charset="-78"/>
               </a:rPr>
               <a:t>ـا</a:t>
@@ -14410,6 +14515,7 @@
                   <a:srgbClr val="1B3B6F"/>
                 </a:solidFill>
                 <a:latin typeface="Amiri" pitchFamily="2" charset="-78"/>
+                <a:ea typeface="Amiri" pitchFamily="2" charset="-78"/>
                 <a:cs typeface="Amiri" pitchFamily="2" charset="-78"/>
               </a:rPr>
               <a:t>ب</a:t>
@@ -14616,6 +14722,7 @@
                   <a:srgbClr val="1B3B6F"/>
                 </a:solidFill>
                 <a:latin typeface="Amiri" pitchFamily="2" charset="-78"/>
+                <a:ea typeface="Amiri" pitchFamily="2" charset="-78"/>
                 <a:cs typeface="Amiri" pitchFamily="2" charset="-78"/>
               </a:rPr>
               <a:t>بَيْتٌ</a:t>
@@ -14692,6 +14799,7 @@
                   <a:srgbClr val="1B3B6F"/>
                 </a:solidFill>
                 <a:latin typeface="Amiri" pitchFamily="2" charset="-78"/>
+                <a:ea typeface="Amiri" pitchFamily="2" charset="-78"/>
                 <a:cs typeface="Amiri" pitchFamily="2" charset="-78"/>
               </a:rPr>
               <a:t>بـ</a:t>
@@ -14768,6 +14876,7 @@
                   <a:srgbClr val="1B3B6F"/>
                 </a:solidFill>
                 <a:latin typeface="Amiri" pitchFamily="2" charset="-78"/>
+                <a:ea typeface="Amiri" pitchFamily="2" charset="-78"/>
                 <a:cs typeface="Amiri" pitchFamily="2" charset="-78"/>
               </a:rPr>
               <a:t>ـيـ</a:t>
@@ -14844,6 +14953,7 @@
                   <a:srgbClr val="1B3B6F"/>
                 </a:solidFill>
                 <a:latin typeface="Amiri" pitchFamily="2" charset="-78"/>
+                <a:ea typeface="Amiri" pitchFamily="2" charset="-78"/>
                 <a:cs typeface="Amiri" pitchFamily="2" charset="-78"/>
               </a:rPr>
               <a:t>ـت</a:t>
@@ -15118,6 +15228,7 @@
                   <a:srgbClr val="D4AF37"/>
                 </a:solidFill>
                 <a:latin typeface="Amiri" pitchFamily="2" charset="-78"/>
+                <a:ea typeface="Amiri" pitchFamily="2" charset="-78"/>
                 <a:cs typeface="Amiri" pitchFamily="2" charset="-78"/>
               </a:rPr>
               <a:t>م</a:t>
@@ -15438,6 +15549,7 @@
                   <a:srgbClr val="8A6D1E"/>
                 </a:solidFill>
                 <a:latin typeface="Amiri" pitchFamily="2" charset="-78"/>
+                <a:ea typeface="Amiri" pitchFamily="2" charset="-78"/>
                 <a:cs typeface="Amiri" pitchFamily="2" charset="-78"/>
               </a:rPr>
               <a:t>اُكْتُبِ الأَشْكَالَ الأَرْبَعَةَ</a:t>
@@ -15794,6 +15906,7 @@
                   <a:srgbClr val="1B3B6F"/>
                 </a:solidFill>
                 <a:latin typeface="Amiri" pitchFamily="2" charset="-78"/>
+                <a:ea typeface="Amiri" pitchFamily="2" charset="-78"/>
                 <a:cs typeface="Amiri" pitchFamily="2" charset="-78"/>
               </a:rPr>
               <a:t>س</a:t>
@@ -15832,6 +15945,7 @@
                   <a:srgbClr val="1B3B6F"/>
                 </a:solidFill>
                 <a:latin typeface="Amiri" pitchFamily="2" charset="-78"/>
+                <a:ea typeface="Amiri" pitchFamily="2" charset="-78"/>
                 <a:cs typeface="Amiri" pitchFamily="2" charset="-78"/>
               </a:rPr>
               <a:t>سـ</a:t>
@@ -15870,6 +15984,7 @@
                   <a:srgbClr val="1B3B6F"/>
                 </a:solidFill>
                 <a:latin typeface="Amiri" pitchFamily="2" charset="-78"/>
+                <a:ea typeface="Amiri" pitchFamily="2" charset="-78"/>
                 <a:cs typeface="Amiri" pitchFamily="2" charset="-78"/>
               </a:rPr>
               <a:t>ـسـ</a:t>
@@ -15908,6 +16023,7 @@
                   <a:srgbClr val="1B3B6F"/>
                 </a:solidFill>
                 <a:latin typeface="Amiri" pitchFamily="2" charset="-78"/>
+                <a:ea typeface="Amiri" pitchFamily="2" charset="-78"/>
                 <a:cs typeface="Amiri" pitchFamily="2" charset="-78"/>
               </a:rPr>
               <a:t>ـس</a:t>
@@ -16076,6 +16192,7 @@
                   <a:srgbClr val="1B3B6F"/>
                 </a:solidFill>
                 <a:latin typeface="Amiri" pitchFamily="2" charset="-78"/>
+                <a:ea typeface="Amiri" pitchFamily="2" charset="-78"/>
                 <a:cs typeface="Amiri" pitchFamily="2" charset="-78"/>
               </a:rPr>
               <a:t>ع</a:t>
@@ -16114,6 +16231,7 @@
                   <a:srgbClr val="1B3B6F"/>
                 </a:solidFill>
                 <a:latin typeface="Amiri" pitchFamily="2" charset="-78"/>
+                <a:ea typeface="Amiri" pitchFamily="2" charset="-78"/>
                 <a:cs typeface="Amiri" pitchFamily="2" charset="-78"/>
               </a:rPr>
               <a:t>عـ</a:t>
@@ -16152,6 +16270,7 @@
                   <a:srgbClr val="1B3B6F"/>
                 </a:solidFill>
                 <a:latin typeface="Amiri" pitchFamily="2" charset="-78"/>
+                <a:ea typeface="Amiri" pitchFamily="2" charset="-78"/>
                 <a:cs typeface="Amiri" pitchFamily="2" charset="-78"/>
               </a:rPr>
               <a:t>ـعـ</a:t>
@@ -16190,6 +16309,7 @@
                   <a:srgbClr val="1B3B6F"/>
                 </a:solidFill>
                 <a:latin typeface="Amiri" pitchFamily="2" charset="-78"/>
+                <a:ea typeface="Amiri" pitchFamily="2" charset="-78"/>
                 <a:cs typeface="Amiri" pitchFamily="2" charset="-78"/>
               </a:rPr>
               <a:t>ـع</a:t>
@@ -16358,6 +16478,7 @@
                   <a:srgbClr val="1B3B6F"/>
                 </a:solidFill>
                 <a:latin typeface="Amiri" pitchFamily="2" charset="-78"/>
+                <a:ea typeface="Amiri" pitchFamily="2" charset="-78"/>
                 <a:cs typeface="Amiri" pitchFamily="2" charset="-78"/>
               </a:rPr>
               <a:t>م</a:t>
@@ -16396,6 +16517,7 @@
                   <a:srgbClr val="1B3B6F"/>
                 </a:solidFill>
                 <a:latin typeface="Amiri" pitchFamily="2" charset="-78"/>
+                <a:ea typeface="Amiri" pitchFamily="2" charset="-78"/>
                 <a:cs typeface="Amiri" pitchFamily="2" charset="-78"/>
               </a:rPr>
               <a:t>مـ</a:t>
@@ -16434,6 +16556,7 @@
                   <a:srgbClr val="1B3B6F"/>
                 </a:solidFill>
                 <a:latin typeface="Amiri" pitchFamily="2" charset="-78"/>
+                <a:ea typeface="Amiri" pitchFamily="2" charset="-78"/>
                 <a:cs typeface="Amiri" pitchFamily="2" charset="-78"/>
               </a:rPr>
               <a:t>ـمـ</a:t>
@@ -16472,6 +16595,7 @@
                   <a:srgbClr val="1B3B6F"/>
                 </a:solidFill>
                 <a:latin typeface="Amiri" pitchFamily="2" charset="-78"/>
+                <a:ea typeface="Amiri" pitchFamily="2" charset="-78"/>
                 <a:cs typeface="Amiri" pitchFamily="2" charset="-78"/>
               </a:rPr>
               <a:t>ـم</a:t>
@@ -16640,6 +16764,7 @@
                   <a:srgbClr val="1B3B6F"/>
                 </a:solidFill>
                 <a:latin typeface="Amiri" pitchFamily="2" charset="-78"/>
+                <a:ea typeface="Amiri" pitchFamily="2" charset="-78"/>
                 <a:cs typeface="Amiri" pitchFamily="2" charset="-78"/>
               </a:rPr>
               <a:t>ف</a:t>
@@ -16678,6 +16803,7 @@
                   <a:srgbClr val="1B3B6F"/>
                 </a:solidFill>
                 <a:latin typeface="Amiri" pitchFamily="2" charset="-78"/>
+                <a:ea typeface="Amiri" pitchFamily="2" charset="-78"/>
                 <a:cs typeface="Amiri" pitchFamily="2" charset="-78"/>
               </a:rPr>
               <a:t>فـ</a:t>
@@ -16716,6 +16842,7 @@
                   <a:srgbClr val="1B3B6F"/>
                 </a:solidFill>
                 <a:latin typeface="Amiri" pitchFamily="2" charset="-78"/>
+                <a:ea typeface="Amiri" pitchFamily="2" charset="-78"/>
                 <a:cs typeface="Amiri" pitchFamily="2" charset="-78"/>
               </a:rPr>
               <a:t>ـفـ</a:t>
@@ -16754,6 +16881,7 @@
                   <a:srgbClr val="1B3B6F"/>
                 </a:solidFill>
                 <a:latin typeface="Amiri" pitchFamily="2" charset="-78"/>
+                <a:ea typeface="Amiri" pitchFamily="2" charset="-78"/>
                 <a:cs typeface="Amiri" pitchFamily="2" charset="-78"/>
               </a:rPr>
               <a:t>ـف</a:t>
@@ -16857,6 +16985,7 @@
                   <a:srgbClr val="1B3B6F"/>
                 </a:solidFill>
                 <a:latin typeface="Amiri" pitchFamily="2" charset="-78"/>
+                <a:ea typeface="Amiri" pitchFamily="2" charset="-78"/>
                 <a:cs typeface="Amiri" pitchFamily="2" charset="-78"/>
               </a:rPr>
               <a:t>ه</a:t>
@@ -16895,6 +17024,7 @@
                   <a:srgbClr val="1B3B6F"/>
                 </a:solidFill>
                 <a:latin typeface="Amiri" pitchFamily="2" charset="-78"/>
+                <a:ea typeface="Amiri" pitchFamily="2" charset="-78"/>
                 <a:cs typeface="Amiri" pitchFamily="2" charset="-78"/>
               </a:rPr>
               <a:t>هـ</a:t>
@@ -16933,6 +17063,7 @@
                   <a:srgbClr val="1B3B6F"/>
                 </a:solidFill>
                 <a:latin typeface="Amiri" pitchFamily="2" charset="-78"/>
+                <a:ea typeface="Amiri" pitchFamily="2" charset="-78"/>
                 <a:cs typeface="Amiri" pitchFamily="2" charset="-78"/>
               </a:rPr>
               <a:t>ـهـ</a:t>
@@ -16971,6 +17102,7 @@
                   <a:srgbClr val="1B3B6F"/>
                 </a:solidFill>
                 <a:latin typeface="Amiri" pitchFamily="2" charset="-78"/>
+                <a:ea typeface="Amiri" pitchFamily="2" charset="-78"/>
                 <a:cs typeface="Amiri" pitchFamily="2" charset="-78"/>
               </a:rPr>
               <a:t>ـه</a:t>
@@ -17104,6 +17236,7 @@
                   <a:srgbClr val="D4AF37"/>
                 </a:solidFill>
                 <a:latin typeface="Amiri" pitchFamily="2" charset="-78"/>
+                <a:ea typeface="Amiri" pitchFamily="2" charset="-78"/>
                 <a:cs typeface="Amiri" pitchFamily="2" charset="-78"/>
               </a:rPr>
               <a:t>م</a:t>
@@ -17424,6 +17557,7 @@
                   <a:srgbClr val="8A6D1E"/>
                 </a:solidFill>
                 <a:latin typeface="Amiri" pitchFamily="2" charset="-78"/>
+                <a:ea typeface="Amiri" pitchFamily="2" charset="-78"/>
                 <a:cs typeface="Amiri" pitchFamily="2" charset="-78"/>
               </a:rPr>
               <a:t>اِبْحَثْ عَنِ الشَّكْلِ</a:t>
@@ -17635,6 +17769,7 @@
                   <a:srgbClr val="1B3B6F"/>
                 </a:solidFill>
                 <a:latin typeface="Amiri" pitchFamily="2" charset="-78"/>
+                <a:ea typeface="Amiri" pitchFamily="2" charset="-78"/>
                 <a:cs typeface="Amiri" pitchFamily="2" charset="-78"/>
               </a:rPr>
               <a:t>ـسـ</a:t>
@@ -18111,6 +18246,7 @@
                   <a:srgbClr val="1B3B6F"/>
                 </a:solidFill>
                 <a:latin typeface="Amiri" pitchFamily="2" charset="-78"/>
+                <a:ea typeface="Amiri" pitchFamily="2" charset="-78"/>
                 <a:cs typeface="Amiri" pitchFamily="2" charset="-78"/>
               </a:rPr>
               <a:t>عـ</a:t>
@@ -18587,6 +18723,7 @@
                   <a:srgbClr val="1B3B6F"/>
                 </a:solidFill>
                 <a:latin typeface="Amiri" pitchFamily="2" charset="-78"/>
+                <a:ea typeface="Amiri" pitchFamily="2" charset="-78"/>
                 <a:cs typeface="Amiri" pitchFamily="2" charset="-78"/>
               </a:rPr>
               <a:t>ـم</a:t>
@@ -19063,6 +19200,7 @@
                   <a:srgbClr val="1B3B6F"/>
                 </a:solidFill>
                 <a:latin typeface="Amiri" pitchFamily="2" charset="-78"/>
+                <a:ea typeface="Amiri" pitchFamily="2" charset="-78"/>
                 <a:cs typeface="Amiri" pitchFamily="2" charset="-78"/>
               </a:rPr>
               <a:t>ق</a:t>
@@ -19539,6 +19677,7 @@
                   <a:srgbClr val="1B3B6F"/>
                 </a:solidFill>
                 <a:latin typeface="Amiri" pitchFamily="2" charset="-78"/>
+                <a:ea typeface="Amiri" pitchFamily="2" charset="-78"/>
                 <a:cs typeface="Amiri" pitchFamily="2" charset="-78"/>
               </a:rPr>
               <a:t>ـهـ</a:t>
@@ -20160,6 +20299,7 @@
                   <a:srgbClr val="D4AF37"/>
                 </a:solidFill>
                 <a:latin typeface="Amiri" pitchFamily="2" charset="-78"/>
+                <a:ea typeface="Amiri" pitchFamily="2" charset="-78"/>
                 <a:cs typeface="Amiri" pitchFamily="2" charset="-78"/>
               </a:rPr>
               <a:t>م</a:t>
@@ -20480,6 +20620,7 @@
                   <a:srgbClr val="8A6D1E"/>
                 </a:solidFill>
                 <a:latin typeface="Amiri" pitchFamily="2" charset="-78"/>
+                <a:ea typeface="Amiri" pitchFamily="2" charset="-78"/>
                 <a:cs typeface="Amiri" pitchFamily="2" charset="-78"/>
               </a:rPr>
               <a:t>الإِجَابَاتُ</a:t>
@@ -20691,6 +20832,7 @@
                   <a:srgbClr val="1B3B6F"/>
                 </a:solidFill>
                 <a:latin typeface="Amiri" pitchFamily="2" charset="-78"/>
+                <a:ea typeface="Amiri" pitchFamily="2" charset="-78"/>
                 <a:cs typeface="Amiri" pitchFamily="2" charset="-78"/>
               </a:rPr>
               <a:t>ـسـ</a:t>
@@ -21232,6 +21374,7 @@
                   <a:srgbClr val="1B3B6F"/>
                 </a:solidFill>
                 <a:latin typeface="Amiri" pitchFamily="2" charset="-78"/>
+                <a:ea typeface="Amiri" pitchFamily="2" charset="-78"/>
                 <a:cs typeface="Amiri" pitchFamily="2" charset="-78"/>
               </a:rPr>
               <a:t>عـ</a:t>
@@ -21773,6 +21916,7 @@
                   <a:srgbClr val="1B3B6F"/>
                 </a:solidFill>
                 <a:latin typeface="Amiri" pitchFamily="2" charset="-78"/>
+                <a:ea typeface="Amiri" pitchFamily="2" charset="-78"/>
                 <a:cs typeface="Amiri" pitchFamily="2" charset="-78"/>
               </a:rPr>
               <a:t>ـم</a:t>
@@ -22314,6 +22458,7 @@
                   <a:srgbClr val="1B3B6F"/>
                 </a:solidFill>
                 <a:latin typeface="Amiri" pitchFamily="2" charset="-78"/>
+                <a:ea typeface="Amiri" pitchFamily="2" charset="-78"/>
                 <a:cs typeface="Amiri" pitchFamily="2" charset="-78"/>
               </a:rPr>
               <a:t>ق</a:t>
@@ -22855,6 +23000,7 @@
                   <a:srgbClr val="1B3B6F"/>
                 </a:solidFill>
                 <a:latin typeface="Amiri" pitchFamily="2" charset="-78"/>
+                <a:ea typeface="Amiri" pitchFamily="2" charset="-78"/>
                 <a:cs typeface="Amiri" pitchFamily="2" charset="-78"/>
               </a:rPr>
               <a:t>ـهـ</a:t>
@@ -23541,6 +23687,7 @@
                   <a:srgbClr val="D4AF37"/>
                 </a:solidFill>
                 <a:latin typeface="Amiri" pitchFamily="2" charset="-78"/>
+                <a:ea typeface="Amiri" pitchFamily="2" charset="-78"/>
                 <a:cs typeface="Amiri" pitchFamily="2" charset="-78"/>
               </a:rPr>
               <a:t>م</a:t>
@@ -23861,6 +24008,7 @@
                   <a:srgbClr val="8A6D1E"/>
                 </a:solidFill>
                 <a:latin typeface="Amiri" pitchFamily="2" charset="-78"/>
+                <a:ea typeface="Amiri" pitchFamily="2" charset="-78"/>
                 <a:cs typeface="Amiri" pitchFamily="2" charset="-78"/>
               </a:rPr>
               <a:t>مُهَنْدِسُ الاِتِّصَالِ</a:t>
@@ -23971,6 +24119,7 @@
                   <a:srgbClr val="1B3B6F"/>
                 </a:solidFill>
                 <a:latin typeface="Amiri" pitchFamily="2" charset="-78"/>
+                <a:ea typeface="Amiri" pitchFamily="2" charset="-78"/>
                 <a:cs typeface="Amiri" pitchFamily="2" charset="-78"/>
               </a:rPr>
               <a:t>ل</a:t>
@@ -24043,6 +24192,7 @@
                   <a:srgbClr val="1B3B6F"/>
                 </a:solidFill>
                 <a:latin typeface="Amiri" pitchFamily="2" charset="-78"/>
+                <a:ea typeface="Amiri" pitchFamily="2" charset="-78"/>
                 <a:cs typeface="Amiri" pitchFamily="2" charset="-78"/>
               </a:rPr>
               <a:t>ا</a:t>
@@ -24115,6 +24265,7 @@
                   <a:srgbClr val="1B3B6F"/>
                 </a:solidFill>
                 <a:latin typeface="Amiri" pitchFamily="2" charset="-78"/>
+                <a:ea typeface="Amiri" pitchFamily="2" charset="-78"/>
                 <a:cs typeface="Amiri" pitchFamily="2" charset="-78"/>
               </a:rPr>
               <a:t>ك</a:t>
@@ -24187,6 +24338,7 @@
                   <a:srgbClr val="1B3B6F"/>
                 </a:solidFill>
                 <a:latin typeface="Amiri" pitchFamily="2" charset="-78"/>
+                <a:ea typeface="Amiri" pitchFamily="2" charset="-78"/>
                 <a:cs typeface="Amiri" pitchFamily="2" charset="-78"/>
               </a:rPr>
               <a:t>ز</a:t>
@@ -24259,6 +24411,7 @@
                   <a:srgbClr val="1B3B6F"/>
                 </a:solidFill>
                 <a:latin typeface="Amiri" pitchFamily="2" charset="-78"/>
+                <a:ea typeface="Amiri" pitchFamily="2" charset="-78"/>
                 <a:cs typeface="Amiri" pitchFamily="2" charset="-78"/>
               </a:rPr>
               <a:t>ف</a:t>
@@ -24331,6 +24484,7 @@
                   <a:srgbClr val="1B3B6F"/>
                 </a:solidFill>
                 <a:latin typeface="Amiri" pitchFamily="2" charset="-78"/>
+                <a:ea typeface="Amiri" pitchFamily="2" charset="-78"/>
                 <a:cs typeface="Amiri" pitchFamily="2" charset="-78"/>
               </a:rPr>
               <a:t>و</a:t>
@@ -24403,6 +24557,7 @@
                   <a:srgbClr val="1B3B6F"/>
                 </a:solidFill>
                 <a:latin typeface="Amiri" pitchFamily="2" charset="-78"/>
+                <a:ea typeface="Amiri" pitchFamily="2" charset="-78"/>
                 <a:cs typeface="Amiri" pitchFamily="2" charset="-78"/>
               </a:rPr>
               <a:t>ع</a:t>
@@ -24475,6 +24630,7 @@
                   <a:srgbClr val="1B3B6F"/>
                 </a:solidFill>
                 <a:latin typeface="Amiri" pitchFamily="2" charset="-78"/>
+                <a:ea typeface="Amiri" pitchFamily="2" charset="-78"/>
                 <a:cs typeface="Amiri" pitchFamily="2" charset="-78"/>
               </a:rPr>
               <a:t>ذ</a:t>
@@ -24792,6 +24948,7 @@
                   <a:srgbClr val="D4AF37"/>
                 </a:solidFill>
                 <a:latin typeface="Amiri" pitchFamily="2" charset="-78"/>
+                <a:ea typeface="Amiri" pitchFamily="2" charset="-78"/>
                 <a:cs typeface="Amiri" pitchFamily="2" charset="-78"/>
               </a:rPr>
               <a:t>م</a:t>
@@ -25112,6 +25269,7 @@
                   <a:srgbClr val="8A6D1E"/>
                 </a:solidFill>
                 <a:latin typeface="Amiri" pitchFamily="2" charset="-78"/>
+                <a:ea typeface="Amiri" pitchFamily="2" charset="-78"/>
                 <a:cs typeface="Amiri" pitchFamily="2" charset="-78"/>
               </a:rPr>
               <a:t>الإِجَابَاتُ</a:t>
@@ -25307,6 +25465,7 @@
                   <a:srgbClr val="1B3B6F"/>
                 </a:solidFill>
                 <a:latin typeface="Amiri" pitchFamily="2" charset="-78"/>
+                <a:ea typeface="Amiri" pitchFamily="2" charset="-78"/>
                 <a:cs typeface="Amiri" pitchFamily="2" charset="-78"/>
               </a:rPr>
               <a:t>ل</a:t>
@@ -25372,6 +25531,7 @@
                   <a:srgbClr val="1B3B6F"/>
                 </a:solidFill>
                 <a:latin typeface="Amiri" pitchFamily="2" charset="-78"/>
+                <a:ea typeface="Amiri" pitchFamily="2" charset="-78"/>
                 <a:cs typeface="Amiri" pitchFamily="2" charset="-78"/>
               </a:rPr>
               <a:t>ك</a:t>
@@ -25437,6 +25597,7 @@
                   <a:srgbClr val="1B3B6F"/>
                 </a:solidFill>
                 <a:latin typeface="Amiri" pitchFamily="2" charset="-78"/>
+                <a:ea typeface="Amiri" pitchFamily="2" charset="-78"/>
                 <a:cs typeface="Amiri" pitchFamily="2" charset="-78"/>
               </a:rPr>
               <a:t>ف</a:t>
@@ -25502,6 +25663,7 @@
                   <a:srgbClr val="1B3B6F"/>
                 </a:solidFill>
                 <a:latin typeface="Amiri" pitchFamily="2" charset="-78"/>
+                <a:ea typeface="Amiri" pitchFamily="2" charset="-78"/>
                 <a:cs typeface="Amiri" pitchFamily="2" charset="-78"/>
               </a:rPr>
               <a:t>ع</a:t>
@@ -25659,6 +25821,7 @@
                   <a:srgbClr val="1B3B6F"/>
                 </a:solidFill>
                 <a:latin typeface="Amiri" pitchFamily="2" charset="-78"/>
+                <a:ea typeface="Amiri" pitchFamily="2" charset="-78"/>
                 <a:cs typeface="Amiri" pitchFamily="2" charset="-78"/>
               </a:rPr>
               <a:t>ا</a:t>
@@ -25724,6 +25887,7 @@
                   <a:srgbClr val="1B3B6F"/>
                 </a:solidFill>
                 <a:latin typeface="Amiri" pitchFamily="2" charset="-78"/>
+                <a:ea typeface="Amiri" pitchFamily="2" charset="-78"/>
                 <a:cs typeface="Amiri" pitchFamily="2" charset="-78"/>
               </a:rPr>
               <a:t>ز</a:t>
@@ -25789,6 +25953,7 @@
                   <a:srgbClr val="1B3B6F"/>
                 </a:solidFill>
                 <a:latin typeface="Amiri" pitchFamily="2" charset="-78"/>
+                <a:ea typeface="Amiri" pitchFamily="2" charset="-78"/>
                 <a:cs typeface="Amiri" pitchFamily="2" charset="-78"/>
               </a:rPr>
               <a:t>و</a:t>
@@ -25854,6 +26019,7 @@
                   <a:srgbClr val="1B3B6F"/>
                 </a:solidFill>
                 <a:latin typeface="Amiri" pitchFamily="2" charset="-78"/>
+                <a:ea typeface="Amiri" pitchFamily="2" charset="-78"/>
                 <a:cs typeface="Amiri" pitchFamily="2" charset="-78"/>
               </a:rPr>
               <a:t>ذ</a:t>
@@ -25987,6 +26153,7 @@
                   <a:srgbClr val="D4AF37"/>
                 </a:solidFill>
                 <a:latin typeface="Amiri" pitchFamily="2" charset="-78"/>
+                <a:ea typeface="Amiri" pitchFamily="2" charset="-78"/>
                 <a:cs typeface="Amiri" pitchFamily="2" charset="-78"/>
               </a:rPr>
               <a:t>م</a:t>
@@ -26307,6 +26474,7 @@
                   <a:srgbClr val="8A6D1E"/>
                 </a:solidFill>
                 <a:latin typeface="Amiri" pitchFamily="2" charset="-78"/>
+                <a:ea typeface="Amiri" pitchFamily="2" charset="-78"/>
                 <a:cs typeface="Amiri" pitchFamily="2" charset="-78"/>
               </a:rPr>
               <a:t>آدَابُ الصَّفِّ</a:t>
@@ -27838,6 +28006,7 @@
                   <a:srgbClr val="D4AF37"/>
                 </a:solidFill>
                 <a:latin typeface="Amiri" pitchFamily="2" charset="-78"/>
+                <a:ea typeface="Amiri" pitchFamily="2" charset="-78"/>
                 <a:cs typeface="Amiri" pitchFamily="2" charset="-78"/>
               </a:rPr>
               <a:t>م</a:t>
@@ -28158,6 +28327,7 @@
                   <a:srgbClr val="8A6D1E"/>
                 </a:solidFill>
                 <a:latin typeface="Amiri" pitchFamily="2" charset="-78"/>
+                <a:ea typeface="Amiri" pitchFamily="2" charset="-78"/>
                 <a:cs typeface="Amiri" pitchFamily="2" charset="-78"/>
               </a:rPr>
               <a:t>حَلِّلِ الكَلِمَةَ</a:t>
@@ -28344,6 +28514,7 @@
                   <a:srgbClr val="1B3B6F"/>
                 </a:solidFill>
                 <a:latin typeface="Amiri" pitchFamily="2" charset="-78"/>
+                <a:ea typeface="Amiri" pitchFamily="2" charset="-78"/>
                 <a:cs typeface="Amiri" pitchFamily="2" charset="-78"/>
               </a:rPr>
               <a:t>ب</a:t>
@@ -28370,6 +28541,7 @@
                   <a:srgbClr val="1B3B6F"/>
                 </a:solidFill>
                 <a:latin typeface="Amiri" pitchFamily="2" charset="-78"/>
+                <a:ea typeface="Amiri" pitchFamily="2" charset="-78"/>
                 <a:cs typeface="Amiri" pitchFamily="2" charset="-78"/>
               </a:rPr>
               <a:t>بَاب</a:t>
@@ -28834,6 +29006,7 @@
                   <a:srgbClr val="1B3B6F"/>
                 </a:solidFill>
                 <a:latin typeface="Amiri" pitchFamily="2" charset="-78"/>
+                <a:ea typeface="Amiri" pitchFamily="2" charset="-78"/>
                 <a:cs typeface="Amiri" pitchFamily="2" charset="-78"/>
               </a:rPr>
               <a:t>ي</a:t>
@@ -28860,6 +29033,7 @@
                   <a:srgbClr val="1B3B6F"/>
                 </a:solidFill>
                 <a:latin typeface="Amiri" pitchFamily="2" charset="-78"/>
+                <a:ea typeface="Amiri" pitchFamily="2" charset="-78"/>
                 <a:cs typeface="Amiri" pitchFamily="2" charset="-78"/>
               </a:rPr>
               <a:t>بَيْت</a:t>
@@ -29324,6 +29498,7 @@
                   <a:srgbClr val="1B3B6F"/>
                 </a:solidFill>
                 <a:latin typeface="Amiri" pitchFamily="2" charset="-78"/>
+                <a:ea typeface="Amiri" pitchFamily="2" charset="-78"/>
                 <a:cs typeface="Amiri" pitchFamily="2" charset="-78"/>
               </a:rPr>
               <a:t>ك</a:t>
@@ -29350,6 +29525,7 @@
                   <a:srgbClr val="1B3B6F"/>
                 </a:solidFill>
                 <a:latin typeface="Amiri" pitchFamily="2" charset="-78"/>
+                <a:ea typeface="Amiri" pitchFamily="2" charset="-78"/>
                 <a:cs typeface="Amiri" pitchFamily="2" charset="-78"/>
               </a:rPr>
               <a:t>كَتَبَ</a:t>
@@ -29814,6 +29990,7 @@
                   <a:srgbClr val="1B3B6F"/>
                 </a:solidFill>
                 <a:latin typeface="Amiri" pitchFamily="2" charset="-78"/>
+                <a:ea typeface="Amiri" pitchFamily="2" charset="-78"/>
                 <a:cs typeface="Amiri" pitchFamily="2" charset="-78"/>
               </a:rPr>
               <a:t>دَرَسَ</a:t>
@@ -29941,6 +30118,7 @@
                   <a:srgbClr val="1F2A37"/>
                 </a:solidFill>
                 <a:latin typeface="Amiri" pitchFamily="2" charset="-78"/>
+                <a:ea typeface="Amiri" pitchFamily="2" charset="-78"/>
                 <a:cs typeface="Amiri" pitchFamily="2" charset="-78"/>
               </a:rPr>
               <a:t>س</a:t>
@@ -30156,6 +30334,7 @@
                   <a:srgbClr val="1F2A37"/>
                 </a:solidFill>
                 <a:latin typeface="Amiri" pitchFamily="2" charset="-78"/>
+                <a:ea typeface="Amiri" pitchFamily="2" charset="-78"/>
                 <a:cs typeface="Amiri" pitchFamily="2" charset="-78"/>
               </a:rPr>
               <a:t>د</a:t>
@@ -30182,6 +30361,7 @@
                   <a:srgbClr val="1F2A37"/>
                 </a:solidFill>
                 <a:latin typeface="Amiri" pitchFamily="2" charset="-78"/>
+                <a:ea typeface="Amiri" pitchFamily="2" charset="-78"/>
                 <a:cs typeface="Amiri" pitchFamily="2" charset="-78"/>
               </a:rPr>
               <a:t>ر</a:t>
@@ -30713,6 +30893,7 @@
                   <a:srgbClr val="1E6B52"/>
                 </a:solidFill>
                 <a:latin typeface="Amiri" pitchFamily="2" charset="-78"/>
+                <a:ea typeface="Amiri" pitchFamily="2" charset="-78"/>
                 <a:cs typeface="Amiri" pitchFamily="2" charset="-78"/>
               </a:rPr>
               <a:t>ا د ذ ر ز و</a:t>
@@ -30846,6 +31027,7 @@
                   <a:srgbClr val="D4AF37"/>
                 </a:solidFill>
                 <a:latin typeface="Amiri" pitchFamily="2" charset="-78"/>
+                <a:ea typeface="Amiri" pitchFamily="2" charset="-78"/>
                 <a:cs typeface="Amiri" pitchFamily="2" charset="-78"/>
               </a:rPr>
               <a:t>م</a:t>
@@ -31166,6 +31348,7 @@
                   <a:srgbClr val="8A6D1E"/>
                 </a:solidFill>
                 <a:latin typeface="Amiri" pitchFamily="2" charset="-78"/>
+                <a:ea typeface="Amiri" pitchFamily="2" charset="-78"/>
                 <a:cs typeface="Amiri" pitchFamily="2" charset="-78"/>
               </a:rPr>
               <a:t>الإِجَابَاتُ</a:t>
@@ -31352,6 +31535,7 @@
                   <a:srgbClr val="1B3B6F"/>
                 </a:solidFill>
                 <a:latin typeface="Amiri" pitchFamily="2" charset="-78"/>
+                <a:ea typeface="Amiri" pitchFamily="2" charset="-78"/>
                 <a:cs typeface="Amiri" pitchFamily="2" charset="-78"/>
               </a:rPr>
               <a:t>ب</a:t>
@@ -31378,6 +31562,7 @@
                   <a:srgbClr val="1B3B6F"/>
                 </a:solidFill>
                 <a:latin typeface="Amiri" pitchFamily="2" charset="-78"/>
+                <a:ea typeface="Amiri" pitchFamily="2" charset="-78"/>
                 <a:cs typeface="Amiri" pitchFamily="2" charset="-78"/>
               </a:rPr>
               <a:t>بَاب</a:t>
@@ -31907,6 +32092,7 @@
                   <a:srgbClr val="1B3B6F"/>
                 </a:solidFill>
                 <a:latin typeface="Amiri" pitchFamily="2" charset="-78"/>
+                <a:ea typeface="Amiri" pitchFamily="2" charset="-78"/>
                 <a:cs typeface="Amiri" pitchFamily="2" charset="-78"/>
               </a:rPr>
               <a:t>ي</a:t>
@@ -31933,6 +32119,7 @@
                   <a:srgbClr val="1B3B6F"/>
                 </a:solidFill>
                 <a:latin typeface="Amiri" pitchFamily="2" charset="-78"/>
+                <a:ea typeface="Amiri" pitchFamily="2" charset="-78"/>
                 <a:cs typeface="Amiri" pitchFamily="2" charset="-78"/>
               </a:rPr>
               <a:t>بَيْت</a:t>
@@ -32462,6 +32649,7 @@
                   <a:srgbClr val="1B3B6F"/>
                 </a:solidFill>
                 <a:latin typeface="Amiri" pitchFamily="2" charset="-78"/>
+                <a:ea typeface="Amiri" pitchFamily="2" charset="-78"/>
                 <a:cs typeface="Amiri" pitchFamily="2" charset="-78"/>
               </a:rPr>
               <a:t>ك</a:t>
@@ -32488,6 +32676,7 @@
                   <a:srgbClr val="1B3B6F"/>
                 </a:solidFill>
                 <a:latin typeface="Amiri" pitchFamily="2" charset="-78"/>
+                <a:ea typeface="Amiri" pitchFamily="2" charset="-78"/>
                 <a:cs typeface="Amiri" pitchFamily="2" charset="-78"/>
               </a:rPr>
               <a:t>كَتَبَ</a:t>
@@ -33017,6 +33206,7 @@
                   <a:srgbClr val="1B3B6F"/>
                 </a:solidFill>
                 <a:latin typeface="Amiri" pitchFamily="2" charset="-78"/>
+                <a:ea typeface="Amiri" pitchFamily="2" charset="-78"/>
                 <a:cs typeface="Amiri" pitchFamily="2" charset="-78"/>
               </a:rPr>
               <a:t>دَرَسَ</a:t>
@@ -33144,6 +33334,7 @@
                   <a:srgbClr val="9AA1AB"/>
                 </a:solidFill>
                 <a:latin typeface="Amiri" pitchFamily="2" charset="-78"/>
+                <a:ea typeface="Amiri" pitchFamily="2" charset="-78"/>
                 <a:cs typeface="Amiri" pitchFamily="2" charset="-78"/>
               </a:rPr>
               <a:t>س</a:t>
@@ -33386,6 +33577,7 @@
                   <a:srgbClr val="1F2A37"/>
                 </a:solidFill>
                 <a:latin typeface="Amiri" pitchFamily="2" charset="-78"/>
+                <a:ea typeface="Amiri" pitchFamily="2" charset="-78"/>
                 <a:cs typeface="Amiri" pitchFamily="2" charset="-78"/>
               </a:rPr>
               <a:t>د</a:t>
@@ -33412,6 +33604,7 @@
                   <a:srgbClr val="1F2A37"/>
                 </a:solidFill>
                 <a:latin typeface="Amiri" pitchFamily="2" charset="-78"/>
+                <a:ea typeface="Amiri" pitchFamily="2" charset="-78"/>
                 <a:cs typeface="Amiri" pitchFamily="2" charset="-78"/>
               </a:rPr>
               <a:t>ر</a:t>
@@ -33450,6 +33643,7 @@
                   <a:srgbClr val="8A6D1E"/>
                 </a:solidFill>
                 <a:latin typeface="Amiri" pitchFamily="2" charset="-78"/>
+                <a:ea typeface="Amiri" pitchFamily="2" charset="-78"/>
                 <a:cs typeface="Amiri" pitchFamily="2" charset="-78"/>
               </a:rPr>
               <a:t>د</a:t>
@@ -33476,6 +33670,7 @@
                   <a:srgbClr val="8A6D1E"/>
                 </a:solidFill>
                 <a:latin typeface="Amiri" pitchFamily="2" charset="-78"/>
+                <a:ea typeface="Amiri" pitchFamily="2" charset="-78"/>
                 <a:cs typeface="Amiri" pitchFamily="2" charset="-78"/>
               </a:rPr>
               <a:t>ر</a:t>
@@ -33502,6 +33697,7 @@
                   <a:srgbClr val="8A6D1E"/>
                 </a:solidFill>
                 <a:latin typeface="Amiri" pitchFamily="2" charset="-78"/>
+                <a:ea typeface="Amiri" pitchFamily="2" charset="-78"/>
                 <a:cs typeface="Amiri" pitchFamily="2" charset="-78"/>
               </a:rPr>
               <a:t>د ر س</a:t>
@@ -34111,6 +34307,7 @@
                   <a:srgbClr val="1E6B52"/>
                 </a:solidFill>
                 <a:latin typeface="Amiri" pitchFamily="2" charset="-78"/>
+                <a:ea typeface="Amiri" pitchFamily="2" charset="-78"/>
                 <a:cs typeface="Amiri" pitchFamily="2" charset="-78"/>
               </a:rPr>
               <a:t>ا د ذ ر ز و</a:t>
@@ -34244,6 +34441,7 @@
                   <a:srgbClr val="D4AF37"/>
                 </a:solidFill>
                 <a:latin typeface="Amiri" pitchFamily="2" charset="-78"/>
+                <a:ea typeface="Amiri" pitchFamily="2" charset="-78"/>
                 <a:cs typeface="Amiri" pitchFamily="2" charset="-78"/>
               </a:rPr>
               <a:t>م</a:t>
@@ -34564,6 +34762,7 @@
                   <a:srgbClr val="8A6D1E"/>
                 </a:solidFill>
                 <a:latin typeface="Amiri" pitchFamily="2" charset="-78"/>
+                <a:ea typeface="Amiri" pitchFamily="2" charset="-78"/>
                 <a:cs typeface="Amiri" pitchFamily="2" charset="-78"/>
               </a:rPr>
               <a:t>اُكْتُبْ</a:t>
@@ -34739,6 +34938,7 @@
                   <a:srgbClr val="2E8B57"/>
                 </a:solidFill>
                 <a:latin typeface="Amiri" pitchFamily="2" charset="-78"/>
+                <a:ea typeface="Amiri" pitchFamily="2" charset="-78"/>
                 <a:cs typeface="Amiri" pitchFamily="2" charset="-78"/>
               </a:rPr>
               <a:t>الأَسَاسُ</a:t>
@@ -34828,6 +35028,7 @@
                   <a:srgbClr val="1F2A37"/>
                 </a:solidFill>
                 <a:latin typeface="Amiri" pitchFamily="2" charset="-78"/>
+                <a:ea typeface="Amiri" pitchFamily="2" charset="-78"/>
                 <a:cs typeface="Amiri" pitchFamily="2" charset="-78"/>
               </a:rPr>
               <a:t>ب ت ث</a:t>
@@ -35059,6 +35260,7 @@
                   <a:srgbClr val="C9780A"/>
                 </a:solidFill>
                 <a:latin typeface="Amiri" pitchFamily="2" charset="-78"/>
+                <a:ea typeface="Amiri" pitchFamily="2" charset="-78"/>
                 <a:cs typeface="Amiri" pitchFamily="2" charset="-78"/>
               </a:rPr>
               <a:t>التَّطْوِيرُ</a:t>
@@ -35148,6 +35350,7 @@
                   <a:srgbClr val="1F2A37"/>
                 </a:solidFill>
                 <a:latin typeface="Amiri" pitchFamily="2" charset="-78"/>
+                <a:ea typeface="Amiri" pitchFamily="2" charset="-78"/>
                 <a:cs typeface="Amiri" pitchFamily="2" charset="-78"/>
               </a:rPr>
               <a:t>س ش ص ض ط ظ</a:t>
@@ -35379,6 +35582,7 @@
                   <a:srgbClr val="B83227"/>
                 </a:solidFill>
                 <a:latin typeface="Amiri" pitchFamily="2" charset="-78"/>
+                <a:ea typeface="Amiri" pitchFamily="2" charset="-78"/>
                 <a:cs typeface="Amiri" pitchFamily="2" charset="-78"/>
               </a:rPr>
               <a:t>التَّحَدِّي</a:t>
@@ -35468,6 +35672,7 @@
                   <a:srgbClr val="1F2A37"/>
                 </a:solidFill>
                 <a:latin typeface="Amiri" pitchFamily="2" charset="-78"/>
+                <a:ea typeface="Amiri" pitchFamily="2" charset="-78"/>
                 <a:cs typeface="Amiri" pitchFamily="2" charset="-78"/>
               </a:rPr>
               <a:t>كَتَبَ، بَاب، بَيْت</a:t>
@@ -35494,6 +35699,7 @@
                   <a:srgbClr val="1F2A37"/>
                 </a:solidFill>
                 <a:latin typeface="Amiri" pitchFamily="2" charset="-78"/>
+                <a:ea typeface="Amiri" pitchFamily="2" charset="-78"/>
                 <a:cs typeface="Amiri" pitchFamily="2" charset="-78"/>
               </a:rPr>
               <a:t>مَدْرَسَة</a:t>
@@ -35520,6 +35726,7 @@
                   <a:srgbClr val="1F2A37"/>
                 </a:solidFill>
                 <a:latin typeface="Amiri" pitchFamily="2" charset="-78"/>
+                <a:ea typeface="Amiri" pitchFamily="2" charset="-78"/>
                 <a:cs typeface="Amiri" pitchFamily="2" charset="-78"/>
               </a:rPr>
               <a:t>رَسُول</a:t>
@@ -35747,6 +35954,7 @@
                   <a:srgbClr val="D4AF37"/>
                 </a:solidFill>
                 <a:latin typeface="Amiri" pitchFamily="2" charset="-78"/>
+                <a:ea typeface="Amiri" pitchFamily="2" charset="-78"/>
                 <a:cs typeface="Amiri" pitchFamily="2" charset="-78"/>
               </a:rPr>
               <a:t>م</a:t>
@@ -36067,6 +36275,7 @@
                   <a:srgbClr val="8A6D1E"/>
                 </a:solidFill>
                 <a:latin typeface="Amiri" pitchFamily="2" charset="-78"/>
+                <a:ea typeface="Amiri" pitchFamily="2" charset="-78"/>
                 <a:cs typeface="Amiri" pitchFamily="2" charset="-78"/>
               </a:rPr>
               <a:t>التَّحَدُّثُ</a:t>
@@ -36837,6 +37046,7 @@
                   <a:srgbClr val="1B3B6F"/>
                 </a:solidFill>
                 <a:latin typeface="Amiri" pitchFamily="2" charset="-78"/>
+                <a:ea typeface="Amiri" pitchFamily="2" charset="-78"/>
                 <a:cs typeface="Amiri" pitchFamily="2" charset="-78"/>
               </a:rPr>
               <a:t>مَا هٰذَا الحَرْفُ؟</a:t>
@@ -36974,6 +37184,7 @@
                   <a:srgbClr val="1B3B6F"/>
                 </a:solidFill>
                 <a:latin typeface="Amiri" pitchFamily="2" charset="-78"/>
+                <a:ea typeface="Amiri" pitchFamily="2" charset="-78"/>
                 <a:cs typeface="Amiri" pitchFamily="2" charset="-78"/>
               </a:rPr>
               <a:t>أَوَّلِيٌّ أَمْ وَسَطِيٌّ أَمْ نِهَائِيٌّ؟</a:t>
@@ -37111,6 +37322,7 @@
                   <a:srgbClr val="1B3B6F"/>
                 </a:solidFill>
                 <a:latin typeface="Amiri" pitchFamily="2" charset="-78"/>
+                <a:ea typeface="Amiri" pitchFamily="2" charset="-78"/>
                 <a:cs typeface="Amiri" pitchFamily="2" charset="-78"/>
               </a:rPr>
               <a:t>أَيْنَ الاِنْفِصَالُ؟</a:t>
@@ -37248,6 +37460,7 @@
                   <a:srgbClr val="1B3B6F"/>
                 </a:solidFill>
                 <a:latin typeface="Amiri" pitchFamily="2" charset="-78"/>
+                <a:ea typeface="Amiri" pitchFamily="2" charset="-78"/>
                 <a:cs typeface="Amiri" pitchFamily="2" charset="-78"/>
               </a:rPr>
               <a:t>حَلِّلْ «مَدْرَسَة».</a:t>
@@ -37423,6 +37636,7 @@
                   <a:srgbClr val="1D5FBF"/>
                 </a:solidFill>
                 <a:latin typeface="Amiri" pitchFamily="2" charset="-78"/>
+                <a:ea typeface="Amiri" pitchFamily="2" charset="-78"/>
                 <a:cs typeface="Amiri" pitchFamily="2" charset="-78"/>
               </a:rPr>
               <a:t>هٰذَا ___ .</a:t>
@@ -37526,6 +37740,7 @@
                   <a:srgbClr val="1F2A37"/>
                 </a:solidFill>
                 <a:latin typeface="Amiri" pitchFamily="2" charset="-78"/>
+                <a:ea typeface="Amiri" pitchFamily="2" charset="-78"/>
                 <a:cs typeface="Amiri" pitchFamily="2" charset="-78"/>
               </a:rPr>
               <a:t>___ لَا يَتَّصِلُ بِمَا بَعْدَهُ .</a:t>
@@ -37629,6 +37844,7 @@
                   <a:srgbClr val="1F2A37"/>
                 </a:solidFill>
                 <a:latin typeface="Amiri" pitchFamily="2" charset="-78"/>
+                <a:ea typeface="Amiri" pitchFamily="2" charset="-78"/>
                 <a:cs typeface="Amiri" pitchFamily="2" charset="-78"/>
               </a:rPr>
               <a:t>مِيمٌ ، دَالٌ ، رَاءٌ ، سِينٌ ، تَاءٌ مَرْبُوطَةٌ</a:t>
@@ -37732,6 +37948,7 @@
                   <a:srgbClr val="1F2A37"/>
                 </a:solidFill>
                 <a:latin typeface="Amiri" pitchFamily="2" charset="-78"/>
+                <a:ea typeface="Amiri" pitchFamily="2" charset="-78"/>
                 <a:cs typeface="Amiri" pitchFamily="2" charset="-78"/>
               </a:rPr>
               <a:t>قَالَ / قَالَتْ : ___ .</a:t>
@@ -37905,6 +38122,7 @@
                   <a:srgbClr val="1F2A37"/>
                 </a:solidFill>
                 <a:latin typeface="Amiri" pitchFamily="2" charset="-78"/>
+                <a:ea typeface="Amiri" pitchFamily="2" charset="-78"/>
                 <a:cs typeface="Amiri" pitchFamily="2" charset="-78"/>
               </a:rPr>
               <a:t>مَا هٰذِهِ الكَلِمَةُ؟ كَتَبَ</a:t>
@@ -38044,6 +38262,7 @@
                   <a:srgbClr val="1F2A37"/>
                 </a:solidFill>
                 <a:latin typeface="Amiri" pitchFamily="2" charset="-78"/>
+                <a:ea typeface="Amiri" pitchFamily="2" charset="-78"/>
                 <a:cs typeface="Amiri" pitchFamily="2" charset="-78"/>
               </a:rPr>
               <a:t>كَافٌ، تَاءٌ، بَاءٌ. كُلُّهَا مُتَّصِلَةٌ.</a:t>
@@ -38215,6 +38434,7 @@
                   <a:srgbClr val="D4AF37"/>
                 </a:solidFill>
                 <a:latin typeface="Amiri" pitchFamily="2" charset="-78"/>
+                <a:ea typeface="Amiri" pitchFamily="2" charset="-78"/>
                 <a:cs typeface="Amiri" pitchFamily="2" charset="-78"/>
               </a:rPr>
               <a:t>م</a:t>
@@ -38535,6 +38755,7 @@
                   <a:srgbClr val="8A6D1E"/>
                 </a:solidFill>
                 <a:latin typeface="Amiri" pitchFamily="2" charset="-78"/>
+                <a:ea typeface="Amiri" pitchFamily="2" charset="-78"/>
                 <a:cs typeface="Amiri" pitchFamily="2" charset="-78"/>
               </a:rPr>
               <a:t>أَخْطَاءٌ شَائِعَةٌ</a:t>
@@ -38920,6 +39141,7 @@
                   <a:srgbClr val="5A6472"/>
                 </a:solidFill>
                 <a:latin typeface="Amiri" pitchFamily="2" charset="-78"/>
+                <a:ea typeface="Amiri" pitchFamily="2" charset="-78"/>
                 <a:cs typeface="Amiri" pitchFamily="2" charset="-78"/>
               </a:rPr>
               <a:t>ا د ذ ر ز و</a:t>
@@ -39269,6 +39491,7 @@
                   <a:srgbClr val="5A6472"/>
                 </a:solidFill>
                 <a:latin typeface="Amiri" pitchFamily="2" charset="-78"/>
+                <a:ea typeface="Amiri" pitchFamily="2" charset="-78"/>
                 <a:cs typeface="Amiri" pitchFamily="2" charset="-78"/>
               </a:rPr>
               <a:t>ب</a:t>
@@ -39295,6 +39518,7 @@
                   <a:srgbClr val="5A6472"/>
                 </a:solidFill>
                 <a:latin typeface="Amiri" pitchFamily="2" charset="-78"/>
+                <a:ea typeface="Amiri" pitchFamily="2" charset="-78"/>
                 <a:cs typeface="Amiri" pitchFamily="2" charset="-78"/>
               </a:rPr>
               <a:t>بَاب</a:t>
@@ -39527,6 +39751,7 @@
                   <a:srgbClr val="5A6472"/>
                 </a:solidFill>
                 <a:latin typeface="Amiri" pitchFamily="2" charset="-78"/>
+                <a:ea typeface="Amiri" pitchFamily="2" charset="-78"/>
                 <a:cs typeface="Amiri" pitchFamily="2" charset="-78"/>
               </a:rPr>
               <a:t>ـهـ</a:t>
@@ -39711,6 +39936,7 @@
                   <a:srgbClr val="D4AF37"/>
                 </a:solidFill>
                 <a:latin typeface="Amiri" pitchFamily="2" charset="-78"/>
+                <a:ea typeface="Amiri" pitchFamily="2" charset="-78"/>
                 <a:cs typeface="Amiri" pitchFamily="2" charset="-78"/>
               </a:rPr>
               <a:t>م</a:t>
@@ -40031,6 +40257,7 @@
                   <a:srgbClr val="8A6D1E"/>
                 </a:solidFill>
                 <a:latin typeface="Amiri" pitchFamily="2" charset="-78"/>
+                <a:ea typeface="Amiri" pitchFamily="2" charset="-78"/>
                 <a:cs typeface="Amiri" pitchFamily="2" charset="-78"/>
               </a:rPr>
               <a:t>قَيِّمْ عَمَلَكَ</a:t>
@@ -41188,6 +41415,7 @@
                   <a:srgbClr val="D4AF37"/>
                 </a:solidFill>
                 <a:latin typeface="Amiri" pitchFamily="2" charset="-78"/>
+                <a:ea typeface="Amiri" pitchFamily="2" charset="-78"/>
                 <a:cs typeface="Amiri" pitchFamily="2" charset="-78"/>
               </a:rPr>
               <a:t>م</a:t>
@@ -41508,6 +41736,7 @@
                   <a:srgbClr val="8A6D1E"/>
                 </a:solidFill>
                 <a:latin typeface="Amiri" pitchFamily="2" charset="-78"/>
+                <a:ea typeface="Amiri" pitchFamily="2" charset="-78"/>
                 <a:cs typeface="Amiri" pitchFamily="2" charset="-78"/>
               </a:rPr>
               <a:t>تَذْكِرَةُ الخُرُوجِ</a:t>
@@ -42132,6 +42361,7 @@
                   <a:srgbClr val="1B3B6F"/>
                 </a:solidFill>
                 <a:latin typeface="Amiri" pitchFamily="2" charset="-78"/>
+                <a:ea typeface="Amiri" pitchFamily="2" charset="-78"/>
                 <a:cs typeface="Amiri" pitchFamily="2" charset="-78"/>
               </a:rPr>
               <a:t>ب ت ث</a:t>
@@ -42927,6 +43157,7 @@
                   <a:srgbClr val="D4AF37"/>
                 </a:solidFill>
                 <a:latin typeface="Amiri" pitchFamily="2" charset="-78"/>
+                <a:ea typeface="Amiri" pitchFamily="2" charset="-78"/>
                 <a:cs typeface="Amiri" pitchFamily="2" charset="-78"/>
               </a:rPr>
               <a:t>م</a:t>
@@ -43247,6 +43478,7 @@
                   <a:srgbClr val="8A6D1E"/>
                 </a:solidFill>
                 <a:latin typeface="Amiri" pitchFamily="2" charset="-78"/>
+                <a:ea typeface="Amiri" pitchFamily="2" charset="-78"/>
                 <a:cs typeface="Amiri" pitchFamily="2" charset="-78"/>
               </a:rPr>
               <a:t>إِجَابَاتُ تَذْكِرَةِ الخُرُوجِ</a:t>
@@ -43788,6 +44020,7 @@
                   <a:srgbClr val="8A6D1E"/>
                 </a:solidFill>
                 <a:latin typeface="Amiri" pitchFamily="2" charset="-78"/>
+                <a:ea typeface="Amiri" pitchFamily="2" charset="-78"/>
                 <a:cs typeface="Amiri" pitchFamily="2" charset="-78"/>
               </a:rPr>
               <a:t>ا د ذ ر ز و</a:t>
@@ -43949,6 +44182,7 @@
                   <a:srgbClr val="1B3B6F"/>
                 </a:solidFill>
                 <a:latin typeface="Amiri" pitchFamily="2" charset="-78"/>
+                <a:ea typeface="Amiri" pitchFamily="2" charset="-78"/>
                 <a:cs typeface="Amiri" pitchFamily="2" charset="-78"/>
               </a:rPr>
               <a:t>ب ت ث</a:t>
@@ -44874,6 +45108,7 @@
                   <a:srgbClr val="D4AF37"/>
                 </a:solidFill>
                 <a:latin typeface="Amiri" pitchFamily="2" charset="-78"/>
+                <a:ea typeface="Amiri" pitchFamily="2" charset="-78"/>
                 <a:cs typeface="Amiri" pitchFamily="2" charset="-78"/>
               </a:rPr>
               <a:t>م</a:t>
@@ -45194,6 +45429,7 @@
                   <a:srgbClr val="8A6D1E"/>
                 </a:solidFill>
                 <a:latin typeface="Amiri" pitchFamily="2" charset="-78"/>
+                <a:ea typeface="Amiri" pitchFamily="2" charset="-78"/>
                 <a:cs typeface="Amiri" pitchFamily="2" charset="-78"/>
               </a:rPr>
               <a:t>التَّحْضِيرُ لِلدَّرْسِ القَادِمِ</a:t>
@@ -45407,6 +45643,7 @@
                   <a:srgbClr val="1B3B6F"/>
                 </a:solidFill>
                 <a:latin typeface="Amiri" pitchFamily="2" charset="-78"/>
+                <a:ea typeface="Amiri" pitchFamily="2" charset="-78"/>
                 <a:cs typeface="Amiri" pitchFamily="2" charset="-78"/>
               </a:rPr>
               <a:t>شَدَّةٌ  ـّ</a:t>
@@ -45486,6 +45723,7 @@
                   <a:srgbClr val="1B3B6F"/>
                 </a:solidFill>
                 <a:latin typeface="Amiri" pitchFamily="2" charset="-78"/>
+                <a:ea typeface="Amiri" pitchFamily="2" charset="-78"/>
                 <a:cs typeface="Amiri" pitchFamily="2" charset="-78"/>
               </a:rPr>
               <a:t>تَنْوِينٌ  ـٌ</a:t>
@@ -45565,6 +45803,7 @@
                   <a:srgbClr val="1B3B6F"/>
                 </a:solidFill>
                 <a:latin typeface="Amiri" pitchFamily="2" charset="-78"/>
+                <a:ea typeface="Amiri" pitchFamily="2" charset="-78"/>
                 <a:cs typeface="Amiri" pitchFamily="2" charset="-78"/>
               </a:rPr>
               <a:t>آ</a:t>
@@ -45644,6 +45883,7 @@
                   <a:srgbClr val="1B3B6F"/>
                 </a:solidFill>
                 <a:latin typeface="Amiri" pitchFamily="2" charset="-78"/>
+                <a:ea typeface="Amiri" pitchFamily="2" charset="-78"/>
                 <a:cs typeface="Amiri" pitchFamily="2" charset="-78"/>
               </a:rPr>
               <a:t>مُحَمَّدٌ</a:t>
@@ -45723,6 +45963,7 @@
                   <a:srgbClr val="1B3B6F"/>
                 </a:solidFill>
                 <a:latin typeface="Amiri" pitchFamily="2" charset="-78"/>
+                <a:ea typeface="Amiri" pitchFamily="2" charset="-78"/>
                 <a:cs typeface="Amiri" pitchFamily="2" charset="-78"/>
               </a:rPr>
               <a:t>كِتَابٌ</a:t>
@@ -45769,11 +46010,12 @@
               <a:buNone/>
             </a:pPr>
             <a:r>
-              <a:rPr lang="en-US" sz="1000" i="1" dirty="0">
+              <a:rPr lang="ar-SA" sz="1000" i="1" dirty="0">
                 <a:solidFill>
                   <a:srgbClr val="5A6472"/>
                 </a:solidFill>
                 <a:latin typeface="Calibri" pitchFamily="34" charset="0"/>
+                <a:ea typeface="Amiri" pitchFamily="2" charset="-78"/>
                 <a:cs typeface="Amiri" pitchFamily="2" charset="-78"/>
               </a:rPr>
               <a:t>  pl. كُتُبٌ</a:t>
@@ -45863,6 +46105,7 @@
                   <a:srgbClr val="1F2A37"/>
                 </a:solidFill>
                 <a:latin typeface="Amiri" pitchFamily="2" charset="-78"/>
+                <a:ea typeface="Amiri" pitchFamily="2" charset="-78"/>
                 <a:cs typeface="Amiri" pitchFamily="2" charset="-78"/>
               </a:rPr>
               <a:t>كِتَابٌ</a:t>
@@ -45914,6 +46157,7 @@
                   <a:srgbClr val="1B3B6F"/>
                 </a:solidFill>
                 <a:latin typeface="Amiri" pitchFamily="2" charset="-78"/>
+                <a:ea typeface="Amiri" pitchFamily="2" charset="-78"/>
                 <a:cs typeface="Amiri" pitchFamily="2" charset="-78"/>
               </a:rPr>
               <a:t>كِتَابٌ = كـ + ـتـ + ـا + ب</a:t>
@@ -46102,6 +46346,7 @@
                   <a:srgbClr val="1F2A37"/>
                 </a:solidFill>
                 <a:latin typeface="Amiri" pitchFamily="2" charset="-78"/>
+                <a:ea typeface="Amiri" pitchFamily="2" charset="-78"/>
                 <a:cs typeface="Amiri" pitchFamily="2" charset="-78"/>
               </a:rPr>
               <a:t>ب ت ث</a:t>
@@ -46265,6 +46510,7 @@
                   <a:srgbClr val="1F2A37"/>
                 </a:solidFill>
                 <a:latin typeface="Amiri" pitchFamily="2" charset="-78"/>
+                <a:ea typeface="Amiri" pitchFamily="2" charset="-78"/>
                 <a:cs typeface="Amiri" pitchFamily="2" charset="-78"/>
               </a:rPr>
               <a:t>س ش ص ض ط ظ</a:t>
@@ -46428,6 +46674,7 @@
                   <a:srgbClr val="1F2A37"/>
                 </a:solidFill>
                 <a:latin typeface="Amiri" pitchFamily="2" charset="-78"/>
+                <a:ea typeface="Amiri" pitchFamily="2" charset="-78"/>
                 <a:cs typeface="Amiri" pitchFamily="2" charset="-78"/>
               </a:rPr>
               <a:t>كَتَبَ، بَاب، بَيْت</a:t>
@@ -46454,6 +46701,7 @@
                   <a:srgbClr val="1F2A37"/>
                 </a:solidFill>
                 <a:latin typeface="Amiri" pitchFamily="2" charset="-78"/>
+                <a:ea typeface="Amiri" pitchFamily="2" charset="-78"/>
                 <a:cs typeface="Amiri" pitchFamily="2" charset="-78"/>
               </a:rPr>
               <a:t>مَدْرَسَة</a:t>
@@ -46480,6 +46728,7 @@
                   <a:srgbClr val="1F2A37"/>
                 </a:solidFill>
                 <a:latin typeface="Amiri" pitchFamily="2" charset="-78"/>
+                <a:ea typeface="Amiri" pitchFamily="2" charset="-78"/>
                 <a:cs typeface="Amiri" pitchFamily="2" charset="-78"/>
               </a:rPr>
               <a:t>رَسُول</a:t>
@@ -46713,6 +46962,7 @@
                   <a:srgbClr val="FFFFFF"/>
                 </a:solidFill>
                 <a:latin typeface="Amiri" pitchFamily="2" charset="-78"/>
+                <a:ea typeface="Amiri" pitchFamily="2" charset="-78"/>
                 <a:cs typeface="Amiri" pitchFamily="2" charset="-78"/>
               </a:rPr>
               <a:t>أَحْسَنْتُمْ! إِلَى اللِّقَاءِ</a:t>
@@ -46865,6 +47115,7 @@
                   <a:srgbClr val="D4AF37"/>
                 </a:solidFill>
                 <a:latin typeface="Amiri" pitchFamily="2" charset="-78"/>
+                <a:ea typeface="Amiri" pitchFamily="2" charset="-78"/>
                 <a:cs typeface="Amiri" pitchFamily="2" charset="-78"/>
               </a:rPr>
               <a:t>الشَّدَّةُ وَالتَّنْوِينُ وَأَلِفُ المَدِّ</a:t>
@@ -46998,6 +47249,7 @@
                   <a:srgbClr val="D4AF37"/>
                 </a:solidFill>
                 <a:latin typeface="Amiri" pitchFamily="2" charset="-78"/>
+                <a:ea typeface="Amiri" pitchFamily="2" charset="-78"/>
                 <a:cs typeface="Amiri" pitchFamily="2" charset="-78"/>
               </a:rPr>
               <a:t>م</a:t>
@@ -47318,6 +47570,7 @@
                   <a:srgbClr val="8A6D1E"/>
                 </a:solidFill>
                 <a:latin typeface="Amiri" pitchFamily="2" charset="-78"/>
+                <a:ea typeface="Amiri" pitchFamily="2" charset="-78"/>
                 <a:cs typeface="Amiri" pitchFamily="2" charset="-78"/>
               </a:rPr>
               <a:t>خَرِيطَةُ الدَّرْسِ</a:t>
@@ -47632,6 +47885,7 @@
                   <a:srgbClr val="0E7C86"/>
                 </a:solidFill>
                 <a:latin typeface="Amiri" pitchFamily="2" charset="-78"/>
+                <a:ea typeface="Amiri" pitchFamily="2" charset="-78"/>
                 <a:cs typeface="Amiri" pitchFamily="2" charset="-78"/>
               </a:rPr>
               <a:t>اِبْدَأِ الآنَ</a:t>
@@ -47908,6 +48162,7 @@
                   <a:srgbClr val="1B3B6F"/>
                 </a:solidFill>
                 <a:latin typeface="Amiri" pitchFamily="2" charset="-78"/>
+                <a:ea typeface="Amiri" pitchFamily="2" charset="-78"/>
                 <a:cs typeface="Amiri" pitchFamily="2" charset="-78"/>
               </a:rPr>
               <a:t>كَلِمَاتٌ وَقَوَاعِدُ</a:t>
@@ -48184,6 +48439,7 @@
                   <a:srgbClr val="6B4C9A"/>
                 </a:solidFill>
                 <a:latin typeface="Amiri" pitchFamily="2" charset="-78"/>
+                <a:ea typeface="Amiri" pitchFamily="2" charset="-78"/>
                 <a:cs typeface="Amiri" pitchFamily="2" charset="-78"/>
               </a:rPr>
               <a:t>شَاهِدْ</a:t>
@@ -48460,6 +48716,7 @@
                   <a:srgbClr val="2F6FB0"/>
                 </a:solidFill>
                 <a:latin typeface="Amiri" pitchFamily="2" charset="-78"/>
+                <a:ea typeface="Amiri" pitchFamily="2" charset="-78"/>
                 <a:cs typeface="Amiri" pitchFamily="2" charset="-78"/>
               </a:rPr>
               <a:t>مَعًا</a:t>
@@ -48736,6 +48993,7 @@
                   <a:srgbClr val="1E6B52"/>
                 </a:solidFill>
                 <a:latin typeface="Amiri" pitchFamily="2" charset="-78"/>
+                <a:ea typeface="Amiri" pitchFamily="2" charset="-78"/>
                 <a:cs typeface="Amiri" pitchFamily="2" charset="-78"/>
               </a:rPr>
               <a:t>وَحْدَكَ</a:t>
@@ -49012,6 +49270,7 @@
                   <a:srgbClr val="8A6D1E"/>
                 </a:solidFill>
                 <a:latin typeface="Amiri" pitchFamily="2" charset="-78"/>
+                <a:ea typeface="Amiri" pitchFamily="2" charset="-78"/>
                 <a:cs typeface="Amiri" pitchFamily="2" charset="-78"/>
               </a:rPr>
               <a:t>قَيِّمْ عَمَلَكَ</a:t>
@@ -49288,6 +49547,7 @@
                   <a:srgbClr val="C45A3C"/>
                 </a:solidFill>
                 <a:latin typeface="Amiri" pitchFamily="2" charset="-78"/>
+                <a:ea typeface="Amiri" pitchFamily="2" charset="-78"/>
                 <a:cs typeface="Amiri" pitchFamily="2" charset="-78"/>
               </a:rPr>
               <a:t>اِسْتَعِدَّ</a:t>
@@ -49531,6 +49791,7 @@
                   <a:srgbClr val="D4AF37"/>
                 </a:solidFill>
                 <a:latin typeface="Amiri" pitchFamily="2" charset="-78"/>
+                <a:ea typeface="Amiri" pitchFamily="2" charset="-78"/>
                 <a:cs typeface="Amiri" pitchFamily="2" charset="-78"/>
               </a:rPr>
               <a:t>م</a:t>
@@ -49851,6 +50112,7 @@
                   <a:srgbClr val="8A6D1E"/>
                 </a:solidFill>
                 <a:latin typeface="Amiri" pitchFamily="2" charset="-78"/>
+                <a:ea typeface="Amiri" pitchFamily="2" charset="-78"/>
                 <a:cs typeface="Amiri" pitchFamily="2" charset="-78"/>
               </a:rPr>
               <a:t>اِبْدَأِ الآنَ</a:t>
@@ -50125,6 +50387,7 @@
                   <a:srgbClr val="1F2A37"/>
                 </a:solidFill>
                 <a:latin typeface="Amiri" pitchFamily="2" charset="-78"/>
+                <a:ea typeface="Amiri" pitchFamily="2" charset="-78"/>
                 <a:cs typeface="Amiri" pitchFamily="2" charset="-78"/>
               </a:rPr>
               <a:t>و</a:t>
@@ -50226,6 +50489,7 @@
                   <a:srgbClr val="1F2A37"/>
                 </a:solidFill>
                 <a:latin typeface="Amiri" pitchFamily="2" charset="-78"/>
+                <a:ea typeface="Amiri" pitchFamily="2" charset="-78"/>
                 <a:cs typeface="Amiri" pitchFamily="2" charset="-78"/>
               </a:rPr>
               <a:t>ي</a:t>
@@ -50327,6 +50591,7 @@
                   <a:srgbClr val="1F2A37"/>
                 </a:solidFill>
                 <a:latin typeface="Amiri" pitchFamily="2" charset="-78"/>
+                <a:ea typeface="Amiri" pitchFamily="2" charset="-78"/>
                 <a:cs typeface="Amiri" pitchFamily="2" charset="-78"/>
               </a:rPr>
               <a:t>ء</a:t>
@@ -50475,6 +50740,7 @@
                   <a:srgbClr val="1B3B6F"/>
                 </a:solidFill>
                 <a:latin typeface="Amiri" pitchFamily="2" charset="-78"/>
+                <a:ea typeface="Amiri" pitchFamily="2" charset="-78"/>
                 <a:cs typeface="Amiri" pitchFamily="2" charset="-78"/>
               </a:rPr>
               <a:t>ا د ذ ر ز و</a:t>
@@ -51276,6 +51542,7 @@
                   <a:srgbClr val="1B3B6F"/>
                 </a:solidFill>
                 <a:latin typeface="Amiri" pitchFamily="2" charset="-78"/>
+                <a:ea typeface="Amiri" pitchFamily="2" charset="-78"/>
                 <a:cs typeface="Amiri" pitchFamily="2" charset="-78"/>
               </a:rPr>
               <a:t>ي</a:t>
@@ -51639,6 +51906,7 @@
                   <a:srgbClr val="1B3B6F"/>
                 </a:solidFill>
                 <a:latin typeface="Amiri" pitchFamily="2" charset="-78"/>
+                <a:ea typeface="Amiri" pitchFamily="2" charset="-78"/>
                 <a:cs typeface="Amiri" pitchFamily="2" charset="-78"/>
               </a:rPr>
               <a:t>كَتَبَ</a:t>
@@ -52290,6 +52558,7 @@
                   <a:srgbClr val="D4AF37"/>
                 </a:solidFill>
                 <a:latin typeface="Amiri" pitchFamily="2" charset="-78"/>
+                <a:ea typeface="Amiri" pitchFamily="2" charset="-78"/>
                 <a:cs typeface="Amiri" pitchFamily="2" charset="-78"/>
               </a:rPr>
               <a:t>م</a:t>
@@ -52610,6 +52879,7 @@
                   <a:srgbClr val="8A6D1E"/>
                 </a:solidFill>
                 <a:latin typeface="Amiri" pitchFamily="2" charset="-78"/>
+                <a:ea typeface="Amiri" pitchFamily="2" charset="-78"/>
                 <a:cs typeface="Amiri" pitchFamily="2" charset="-78"/>
               </a:rPr>
               <a:t>الإِجَابَاتُ وَالتَّعْلِيلُ</a:t>
@@ -52884,6 +53154,7 @@
                   <a:srgbClr val="9AA1AB"/>
                 </a:solidFill>
                 <a:latin typeface="Amiri" pitchFamily="2" charset="-78"/>
+                <a:ea typeface="Amiri" pitchFamily="2" charset="-78"/>
                 <a:cs typeface="Amiri" pitchFamily="2" charset="-78"/>
               </a:rPr>
               <a:t>و</a:t>
@@ -53012,6 +53283,7 @@
                   <a:srgbClr val="1F2A37"/>
                 </a:solidFill>
                 <a:latin typeface="Amiri" pitchFamily="2" charset="-78"/>
+                <a:ea typeface="Amiri" pitchFamily="2" charset="-78"/>
                 <a:cs typeface="Amiri" pitchFamily="2" charset="-78"/>
               </a:rPr>
               <a:t>ي</a:t>
@@ -53113,6 +53385,7 @@
                   <a:srgbClr val="9AA1AB"/>
                 </a:solidFill>
                 <a:latin typeface="Amiri" pitchFamily="2" charset="-78"/>
+                <a:ea typeface="Amiri" pitchFamily="2" charset="-78"/>
                 <a:cs typeface="Amiri" pitchFamily="2" charset="-78"/>
               </a:rPr>
               <a:t>ء</a:t>
@@ -53299,6 +53572,7 @@
                   <a:srgbClr val="1B3B6F"/>
                 </a:solidFill>
                 <a:latin typeface="Amiri" pitchFamily="2" charset="-78"/>
+                <a:ea typeface="Amiri" pitchFamily="2" charset="-78"/>
                 <a:cs typeface="Amiri" pitchFamily="2" charset="-78"/>
               </a:rPr>
               <a:t>ا د ذ ر ز و</a:t>
@@ -54230,6 +54504,7 @@
                   <a:srgbClr val="1B3B6F"/>
                 </a:solidFill>
                 <a:latin typeface="Amiri" pitchFamily="2" charset="-78"/>
+                <a:ea typeface="Amiri" pitchFamily="2" charset="-78"/>
                 <a:cs typeface="Amiri" pitchFamily="2" charset="-78"/>
               </a:rPr>
               <a:t>ي</a:t>
@@ -54658,6 +54933,7 @@
                   <a:srgbClr val="1B3B6F"/>
                 </a:solidFill>
                 <a:latin typeface="Amiri" pitchFamily="2" charset="-78"/>
+                <a:ea typeface="Amiri" pitchFamily="2" charset="-78"/>
                 <a:cs typeface="Amiri" pitchFamily="2" charset="-78"/>
               </a:rPr>
               <a:t>كَتَبَ</a:t>
@@ -55187,6 +55463,7 @@
                   <a:srgbClr val="1B3B6F"/>
                 </a:solidFill>
                 <a:latin typeface="Amiri" pitchFamily="2" charset="-78"/>
+                <a:ea typeface="Amiri" pitchFamily="2" charset="-78"/>
                 <a:cs typeface="Amiri" pitchFamily="2" charset="-78"/>
               </a:rPr>
               <a:t>ب   بـ   ـبـ   ـب</a:t>
@@ -55320,6 +55597,7 @@
                   <a:srgbClr val="D4AF37"/>
                 </a:solidFill>
                 <a:latin typeface="Amiri" pitchFamily="2" charset="-78"/>
+                <a:ea typeface="Amiri" pitchFamily="2" charset="-78"/>
                 <a:cs typeface="Amiri" pitchFamily="2" charset="-78"/>
               </a:rPr>
               <a:t>م</a:t>
@@ -55640,6 +55918,7 @@
                   <a:srgbClr val="8A6D1E"/>
                 </a:solidFill>
                 <a:latin typeface="Amiri" pitchFamily="2" charset="-78"/>
+                <a:ea typeface="Amiri" pitchFamily="2" charset="-78"/>
                 <a:cs typeface="Amiri" pitchFamily="2" charset="-78"/>
               </a:rPr>
               <a:t>الأَهْدَافُ وَمَعَايِيرُ النَّجَاحِ</a:t>
@@ -55788,6 +56067,7 @@
                   <a:srgbClr val="8A6D1E"/>
                 </a:solidFill>
                 <a:latin typeface="Amiri" pitchFamily="2" charset="-78"/>
+                <a:ea typeface="Amiri" pitchFamily="2" charset="-78"/>
                 <a:cs typeface="Amiri" pitchFamily="2" charset="-78"/>
               </a:rPr>
               <a:t>سَتَتَعَلَّمُ اليَوْمَ</a:t>
@@ -56205,6 +56485,7 @@
                   <a:srgbClr val="1F2A37"/>
                 </a:solidFill>
                 <a:latin typeface="Amiri" pitchFamily="2" charset="-78"/>
+                <a:ea typeface="Amiri" pitchFamily="2" charset="-78"/>
                 <a:cs typeface="Amiri" pitchFamily="2" charset="-78"/>
               </a:rPr>
               <a:t>كَتَبَ، بَاب، بَيْت</a:t>
@@ -56437,6 +56718,7 @@
                   <a:srgbClr val="2E8B57"/>
                 </a:solidFill>
                 <a:latin typeface="Amiri" pitchFamily="2" charset="-78"/>
+                <a:ea typeface="Amiri" pitchFamily="2" charset="-78"/>
                 <a:cs typeface="Amiri" pitchFamily="2" charset="-78"/>
               </a:rPr>
               <a:t>ب ت ث</a:t>
@@ -57098,6 +57380,7 @@
                   <a:srgbClr val="D4AF37"/>
                 </a:solidFill>
                 <a:latin typeface="Amiri" pitchFamily="2" charset="-78"/>
+                <a:ea typeface="Amiri" pitchFamily="2" charset="-78"/>
                 <a:cs typeface="Amiri" pitchFamily="2" charset="-78"/>
               </a:rPr>
               <a:t>كَلِمَاتُ الدَّرْسِ</a:t>
@@ -57482,6 +57765,7 @@
                   <a:srgbClr val="1B3B6F"/>
                 </a:solidFill>
                 <a:latin typeface="Amiri" pitchFamily="2" charset="-78"/>
+                <a:ea typeface="Amiri" pitchFamily="2" charset="-78"/>
                 <a:cs typeface="Amiri" pitchFamily="2" charset="-78"/>
               </a:rPr>
               <a:t>مُنْفَصِلٌ</a:t>
@@ -57515,11 +57799,12 @@
               <a:buNone/>
             </a:pPr>
             <a:r>
-              <a:rPr lang="ur-PK" altLang="en-US" sz="1400" b="1" dirty="0">
+              <a:rPr lang="ar-SA" altLang="en-US" sz="1400" b="1" dirty="0">
                 <a:solidFill>
                   <a:srgbClr val="2E8B57"/>
                 </a:solidFill>
                 <a:latin typeface="Amiri" pitchFamily="2" charset="-78"/>
+                <a:ea typeface="Amiri" pitchFamily="2" charset="-78"/>
                 <a:cs typeface="Amiri" pitchFamily="2" charset="-78"/>
               </a:rPr>
               <a:t>‎منفصل‎ </a:t>
@@ -57571,6 +57856,7 @@
                   <a:srgbClr val="1B3B6F"/>
                 </a:solidFill>
                 <a:latin typeface="Amiri" pitchFamily="2" charset="-78"/>
+                <a:ea typeface="Amiri" pitchFamily="2" charset="-78"/>
                 <a:cs typeface="Amiri" pitchFamily="2" charset="-78"/>
               </a:rPr>
               <a:t>أَوَّلُ</a:t>
@@ -57604,11 +57890,12 @@
               <a:buNone/>
             </a:pPr>
             <a:r>
-              <a:rPr lang="ur-PK" altLang="en-US" sz="1400" b="1" dirty="0">
+              <a:rPr lang="ar-SA" altLang="en-US" sz="1400" b="1" dirty="0">
                 <a:solidFill>
                   <a:srgbClr val="2E8B57"/>
                 </a:solidFill>
                 <a:latin typeface="Amiri" pitchFamily="2" charset="-78"/>
+                <a:ea typeface="Amiri" pitchFamily="2" charset="-78"/>
                 <a:cs typeface="Amiri" pitchFamily="2" charset="-78"/>
               </a:rPr>
               <a:t>‎اول‎ </a:t>
@@ -57660,6 +57947,7 @@
                   <a:srgbClr val="1B3B6F"/>
                 </a:solidFill>
                 <a:latin typeface="Amiri" pitchFamily="2" charset="-78"/>
+                <a:ea typeface="Amiri" pitchFamily="2" charset="-78"/>
                 <a:cs typeface="Amiri" pitchFamily="2" charset="-78"/>
               </a:rPr>
               <a:t>وَسَطٌ</a:t>
@@ -57693,11 +57981,12 @@
               <a:buNone/>
             </a:pPr>
             <a:r>
-              <a:rPr lang="ur-PK" altLang="en-US" sz="1400" b="1" dirty="0">
+              <a:rPr lang="ar-SA" altLang="en-US" sz="1400" b="1" dirty="0">
                 <a:solidFill>
                   <a:srgbClr val="2E8B57"/>
                 </a:solidFill>
                 <a:latin typeface="Amiri" pitchFamily="2" charset="-78"/>
+                <a:ea typeface="Amiri" pitchFamily="2" charset="-78"/>
                 <a:cs typeface="Amiri" pitchFamily="2" charset="-78"/>
               </a:rPr>
               <a:t>‎وسط‎ </a:t>
@@ -57749,6 +58038,7 @@
                   <a:srgbClr val="1B3B6F"/>
                 </a:solidFill>
                 <a:latin typeface="Amiri" pitchFamily="2" charset="-78"/>
+                <a:ea typeface="Amiri" pitchFamily="2" charset="-78"/>
                 <a:cs typeface="Amiri" pitchFamily="2" charset="-78"/>
               </a:rPr>
               <a:t>آخِرٌ</a:t>
@@ -57782,11 +58072,12 @@
               <a:buNone/>
             </a:pPr>
             <a:r>
-              <a:rPr lang="ur-PK" altLang="en-US" sz="1400" b="1" dirty="0">
+              <a:rPr lang="ar-SA" altLang="en-US" sz="1400" b="1" dirty="0">
                 <a:solidFill>
                   <a:srgbClr val="2E8B57"/>
                 </a:solidFill>
                 <a:latin typeface="Amiri" pitchFamily="2" charset="-78"/>
+                <a:ea typeface="Amiri" pitchFamily="2" charset="-78"/>
                 <a:cs typeface="Amiri" pitchFamily="2" charset="-78"/>
               </a:rPr>
               <a:t>‎آخر‎ </a:t>
@@ -57838,6 +58129,7 @@
                   <a:srgbClr val="1B3B6F"/>
                 </a:solidFill>
                 <a:latin typeface="Amiri" pitchFamily="2" charset="-78"/>
+                <a:ea typeface="Amiri" pitchFamily="2" charset="-78"/>
                 <a:cs typeface="Amiri" pitchFamily="2" charset="-78"/>
               </a:rPr>
               <a:t>بَابٌ</a:t>
@@ -57871,11 +58163,12 @@
               <a:buNone/>
             </a:pPr>
             <a:r>
-              <a:rPr lang="ur-PK" altLang="en-US" sz="1400" b="1" dirty="0">
+              <a:rPr lang="ar-SA" altLang="en-US" sz="1400" b="1" dirty="0">
                 <a:solidFill>
                   <a:srgbClr val="2E8B57"/>
                 </a:solidFill>
                 <a:latin typeface="Amiri" pitchFamily="2" charset="-78"/>
+                <a:ea typeface="Amiri" pitchFamily="2" charset="-78"/>
                 <a:cs typeface="Amiri" pitchFamily="2" charset="-78"/>
               </a:rPr>
               <a:t>‎باب‎ </a:t>
@@ -58022,6 +58315,7 @@
                   <a:srgbClr val="D4AF37"/>
                 </a:solidFill>
                 <a:latin typeface="Amiri" pitchFamily="2" charset="-78"/>
+                <a:ea typeface="Amiri" pitchFamily="2" charset="-78"/>
                 <a:cs typeface="Amiri" pitchFamily="2" charset="-78"/>
               </a:rPr>
               <a:t>م</a:t>
@@ -58342,6 +58636,7 @@
                   <a:srgbClr val="8A6D1E"/>
                 </a:solidFill>
                 <a:latin typeface="Amiri" pitchFamily="2" charset="-78"/>
+                <a:ea typeface="Amiri" pitchFamily="2" charset="-78"/>
                 <a:cs typeface="Amiri" pitchFamily="2" charset="-78"/>
               </a:rPr>
               <a:t>مُنْفَصِلٌ · أَوَّلِيٌّ · وَسَطِيٌّ · نِهَائِيٌّ</a:t>
@@ -58673,6 +58968,7 @@
                   <a:srgbClr val="5A6472"/>
                 </a:solidFill>
                 <a:latin typeface="Amiri" pitchFamily="2" charset="-78"/>
+                <a:ea typeface="Amiri" pitchFamily="2" charset="-78"/>
                 <a:cs typeface="Amiri" pitchFamily="2" charset="-78"/>
               </a:rPr>
               <a:t>مُنْفَصِلٌ</a:t>
@@ -58711,6 +59007,7 @@
                   <a:srgbClr val="1B3B6F"/>
                 </a:solidFill>
                 <a:latin typeface="Amiri" pitchFamily="2" charset="-78"/>
+                <a:ea typeface="Amiri" pitchFamily="2" charset="-78"/>
                 <a:cs typeface="Amiri" pitchFamily="2" charset="-78"/>
               </a:rPr>
               <a:t>ب</a:t>
@@ -58968,6 +59265,7 @@
                   <a:srgbClr val="5A6472"/>
                 </a:solidFill>
                 <a:latin typeface="Amiri" pitchFamily="2" charset="-78"/>
+                <a:ea typeface="Amiri" pitchFamily="2" charset="-78"/>
                 <a:cs typeface="Amiri" pitchFamily="2" charset="-78"/>
               </a:rPr>
               <a:t>أَوَّلِيٌّ</a:t>
@@ -59006,6 +59304,7 @@
                   <a:srgbClr val="1B3B6F"/>
                 </a:solidFill>
                 <a:latin typeface="Amiri" pitchFamily="2" charset="-78"/>
+                <a:ea typeface="Amiri" pitchFamily="2" charset="-78"/>
                 <a:cs typeface="Amiri" pitchFamily="2" charset="-78"/>
               </a:rPr>
               <a:t>بـ</a:t>
@@ -59263,6 +59562,7 @@
                   <a:srgbClr val="5A6472"/>
                 </a:solidFill>
                 <a:latin typeface="Amiri" pitchFamily="2" charset="-78"/>
+                <a:ea typeface="Amiri" pitchFamily="2" charset="-78"/>
                 <a:cs typeface="Amiri" pitchFamily="2" charset="-78"/>
               </a:rPr>
               <a:t>وَسَطِيٌّ</a:t>
@@ -59301,6 +59601,7 @@
                   <a:srgbClr val="1B3B6F"/>
                 </a:solidFill>
                 <a:latin typeface="Amiri" pitchFamily="2" charset="-78"/>
+                <a:ea typeface="Amiri" pitchFamily="2" charset="-78"/>
                 <a:cs typeface="Amiri" pitchFamily="2" charset="-78"/>
               </a:rPr>
               <a:t>ـبـ</a:t>
@@ -59558,6 +59859,7 @@
                   <a:srgbClr val="5A6472"/>
                 </a:solidFill>
                 <a:latin typeface="Amiri" pitchFamily="2" charset="-78"/>
+                <a:ea typeface="Amiri" pitchFamily="2" charset="-78"/>
                 <a:cs typeface="Amiri" pitchFamily="2" charset="-78"/>
               </a:rPr>
               <a:t>نِهَائِيٌّ</a:t>
@@ -59596,6 +59898,7 @@
                   <a:srgbClr val="1B3B6F"/>
                 </a:solidFill>
                 <a:latin typeface="Amiri" pitchFamily="2" charset="-78"/>
+                <a:ea typeface="Amiri" pitchFamily="2" charset="-78"/>
                 <a:cs typeface="Amiri" pitchFamily="2" charset="-78"/>
               </a:rPr>
               <a:t>ـب</a:t>
@@ -59908,6 +60211,7 @@
                   <a:srgbClr val="D4AF37"/>
                 </a:solidFill>
                 <a:latin typeface="Amiri" pitchFamily="2" charset="-78"/>
+                <a:ea typeface="Amiri" pitchFamily="2" charset="-78"/>
                 <a:cs typeface="Amiri" pitchFamily="2" charset="-78"/>
               </a:rPr>
               <a:t>م</a:t>
@@ -60228,6 +60532,7 @@
                   <a:srgbClr val="8A6D1E"/>
                 </a:solidFill>
                 <a:latin typeface="Amiri" pitchFamily="2" charset="-78"/>
+                <a:ea typeface="Amiri" pitchFamily="2" charset="-78"/>
                 <a:cs typeface="Amiri" pitchFamily="2" charset="-78"/>
               </a:rPr>
               <a:t>اِسْأَلْ أَرْبَعَةَ أَسْئِلَةٍ</a:t>
@@ -60441,6 +60746,7 @@
                   <a:srgbClr val="1B3B6F"/>
                 </a:solidFill>
                 <a:latin typeface="Amiri" pitchFamily="2" charset="-78"/>
+                <a:ea typeface="Amiri" pitchFamily="2" charset="-78"/>
                 <a:cs typeface="Amiri" pitchFamily="2" charset="-78"/>
               </a:rPr>
               <a:t>← ؟</a:t>
@@ -60719,6 +61025,7 @@
                   <a:srgbClr val="1B3B6F"/>
                 </a:solidFill>
                 <a:latin typeface="Amiri" pitchFamily="2" charset="-78"/>
+                <a:ea typeface="Amiri" pitchFamily="2" charset="-78"/>
                 <a:cs typeface="Amiri" pitchFamily="2" charset="-78"/>
               </a:rPr>
               <a:t>؟ ←</a:t>
@@ -60997,6 +61304,7 @@
                   <a:srgbClr val="1B3B6F"/>
                 </a:solidFill>
                 <a:latin typeface="Amiri" pitchFamily="2" charset="-78"/>
+                <a:ea typeface="Amiri" pitchFamily="2" charset="-78"/>
                 <a:cs typeface="Amiri" pitchFamily="2" charset="-78"/>
               </a:rPr>
               <a:t>كَتَبَ</a:t>
@@ -61198,13 +61506,9 @@
     <a:fontScheme name="Office">
       <a:majorFont>
         <a:latin typeface="Calibri Light" panose="020F0302020204030204"/>
-        <a:ea typeface=""/>
-        <a:cs typeface=""/>
-        <a:font script="Jpan" typeface="游ゴシック Light"/>
-        <a:font script="Hang" typeface="맑은 고딕"/>
-        <a:font script="Hans" typeface="等线 Light"/>
-        <a:font script="Hant" typeface="新細明體"/>
-        <a:font script="Arab" typeface="Times New Roman"/>
+        <a:ea typeface="Amiri" pitchFamily="2" charset="-78"/>
+        <a:cs typeface="Amiri" pitchFamily="2" charset="-78"/>
+        <a:font script="Arab" typeface="Amiri"/>
         <a:font script="Hebr" typeface="Times New Roman"/>
         <a:font script="Thai" typeface="Angsana New"/>
         <a:font script="Ethi" typeface="Nyala"/>
@@ -61250,13 +61554,9 @@
       </a:majorFont>
       <a:minorFont>
         <a:latin typeface="Calibri" panose="020F0502020204030204"/>
-        <a:ea typeface=""/>
-        <a:cs typeface=""/>
-        <a:font script="Jpan" typeface="游ゴシック"/>
-        <a:font script="Hang" typeface="맑은 고딕"/>
-        <a:font script="Hans" typeface="等线"/>
-        <a:font script="Hant" typeface="新細明體"/>
-        <a:font script="Arab" typeface="Arial"/>
+        <a:ea typeface="Amiri" pitchFamily="2" charset="-78"/>
+        <a:cs typeface="Amiri" pitchFamily="2" charset="-78"/>
+        <a:font script="Arab" typeface="Amiri"/>
         <a:font script="Hebr" typeface="Arial"/>
         <a:font script="Thai" typeface="Cordia New"/>
         <a:font script="Ethi" typeface="Nyala"/>
